--- a/Topic_A/Exam_Practice/AT-A-L02_Speaking_Workshop_Calendar_Dates_and_the_School_Week.pptx
+++ b/Topic_A/Exam_Practice/AT-A-L02_Speaking_Workshop_Calendar_Dates_and_the_School_Week.pptx
@@ -3326,7 +3326,7 @@
                 <a:latin typeface="Cambria" pitchFamily="34" charset="0"/>
                 <a:cs typeface="Amiri" pitchFamily="2" charset="-78"/>
               </a:rPr>
-              <a:t>Speaking Workshop — Calendar, Dates and the School Week</a:t>
+              <a:t>Speaking Workshop — Calendar and the School Week</a:t>
             </a:r>
             <a:endParaRPr lang="en-US" sz="2650" dirty="0"/>
           </a:p>
@@ -3357,16 +3357,16 @@
               <a:buNone/>
             </a:pPr>
             <a:r>
-              <a:rPr lang="ar-SA" altLang="en-US" sz="3300" b="1" dirty="0">
+              <a:rPr lang="ar-SA" altLang="en-US" sz="3600" b="1" dirty="0">
                 <a:solidFill>
                   <a:srgbClr val="D4AF37"/>
                 </a:solidFill>
                 <a:latin typeface="Amiri" pitchFamily="2" charset="-78"/>
                 <a:cs typeface="Amiri" pitchFamily="2" charset="-78"/>
               </a:rPr>
-              <a:t>وَرْشَةُ التَّحَدُّثِ — التَّقْوِيمُ وَالتَّوَارِيخُ وَالأُسْبُوعُ الدِّرَاسِيُّ</a:t>
-            </a:r>
-            <a:endParaRPr lang="ar-SA" sz="3300" dirty="0"/>
+              <a:t>وَرْشَةُ التَّحَدُّثِ — التَّقْوِيمُ وَالأُسْبُوعُ الدِّرَاسِيُّ</a:t>
+            </a:r>
+            <a:endParaRPr lang="ar-SA" sz="3600" dirty="0"/>
           </a:p>
         </p:txBody>
       </p:sp>

--- a/Topic_A/Exam_Practice/AT-A-L02_Speaking_Workshop_Calendar_Dates_and_the_School_Week.pptx
+++ b/Topic_A/Exam_Practice/AT-A-L02_Speaking_Workshop_Calendar_Dates_and_the_School_Week.pptx
@@ -615,7 +615,11 @@
           <a:lstStyle/>
           <a:p>
             <a:r>
-              <a:rPr lang="en-US" dirty="0"/>
+              <a:rPr lang="ar-SA" dirty="0">
+                <a:latin typeface="Amiri" pitchFamily="2" charset="-78"/>
+                <a:ea typeface="Amiri" pitchFamily="2" charset="-78"/>
+                <a:cs typeface="Amiri" pitchFamily="2" charset="-78"/>
+              </a:rPr>
               <a:t>ROLE PLAY C (Develop) — talking to a visiting teacher.
 SET-UP IN THE BREAKOUT ROOM: A = examiner (reads the left column ONLY — the questions, in order), B = candidate (sees the task column; Core may use the help column), C = observer (ticks the feedback checklist). 1 minute preparation, about 3 minutes speaking, 1 minute feedback, then rotate.
 Task ! is the unexpected question: in the exam the candidate has not seen it — the examiner should read it without warning.
@@ -707,7 +711,11 @@
           <a:lstStyle/>
           <a:p>
             <a:r>
-              <a:rPr lang="en-US" dirty="0"/>
+              <a:rPr lang="ar-SA" dirty="0">
+                <a:latin typeface="Amiri" pitchFamily="2" charset="-78"/>
+                <a:ea typeface="Amiri" pitchFamily="2" charset="-78"/>
+                <a:cs typeface="Amiri" pitchFamily="2" charset="-78"/>
+              </a:rPr>
               <a:t>ROLE PLAY D (Stretch) — an interview for the school council.
 SET-UP IN THE BREAKOUT ROOM: A = examiner (reads the left column ONLY — the questions, in order), B = candidate (sees the task column; Core may use the help column), C = observer (ticks the feedback checklist). 1 minute preparation, about 3 minutes speaking, 1 minute feedback, then rotate.
 Task ! is the unexpected question: in the exam the candidate has not seen it — the examiner should read it without warning.
@@ -1243,7 +1251,11 @@
           <a:lstStyle/>
           <a:p>
             <a:r>
-              <a:rPr lang="en-US" dirty="0"/>
+              <a:rPr lang="ar-SA" dirty="0">
+                <a:latin typeface="Amiri" pitchFamily="2" charset="-78"/>
+                <a:ea typeface="Amiri" pitchFamily="2" charset="-78"/>
+                <a:cs typeface="Amiri" pitchFamily="2" charset="-78"/>
+              </a:rPr>
               <a:t>TOPIC CONVERSATION — Core. Examiner asks the questions in order and may add “لِمَاذَا؟ / هَلْ يُمْكِنُ أَنْ تَشْرَحَ أَكْثَرَ؟” to push for more. Candidate aims for one full sentence per question, with a day, a date or a time.
 </a:t>
             </a:r>
@@ -1332,7 +1344,11 @@
           <a:lstStyle/>
           <a:p>
             <a:r>
-              <a:rPr lang="en-US" dirty="0"/>
+              <a:rPr lang="ar-SA" dirty="0">
+                <a:latin typeface="Amiri" pitchFamily="2" charset="-78"/>
+                <a:ea typeface="Amiri" pitchFamily="2" charset="-78"/>
+                <a:cs typeface="Amiri" pitchFamily="2" charset="-78"/>
+              </a:rPr>
               <a:t>TOPIC CONVERSATION — Develop. Examiner asks the questions in order and may add “لِمَاذَا؟ / هَلْ يُمْكِنُ أَنْ تَشْرَحَ أَكْثَرَ؟” to push for more. Candidate aims for two or three sentences, with times, sequence words and a reason.
 </a:t>
             </a:r>
@@ -1421,7 +1437,11 @@
           <a:lstStyle/>
           <a:p>
             <a:r>
-              <a:rPr lang="en-US" dirty="0"/>
+              <a:rPr lang="ar-SA" dirty="0">
+                <a:latin typeface="Amiri" pitchFamily="2" charset="-78"/>
+                <a:ea typeface="Amiri" pitchFamily="2" charset="-78"/>
+                <a:cs typeface="Amiri" pitchFamily="2" charset="-78"/>
+              </a:rPr>
               <a:t>TOPIC CONVERSATION — Stretch. Examiner asks the questions in order and may add “لِمَاذَا؟ / هَلْ يُمْكِنُ أَنْ تَشْرَحَ أَكْثَرَ؟” to push for more. Candidate aims for a developed answer: comparison, opinion, reason and more than one time frame.
 </a:t>
             </a:r>
@@ -1510,7 +1530,11 @@
           <a:lstStyle/>
           <a:p>
             <a:r>
-              <a:rPr lang="en-US" dirty="0"/>
+              <a:rPr lang="ar-SA" dirty="0">
+                <a:latin typeface="Amiri" pitchFamily="2" charset="-78"/>
+                <a:ea typeface="Amiri" pitchFamily="2" charset="-78"/>
+                <a:cs typeface="Amiri" pitchFamily="2" charset="-78"/>
+              </a:rPr>
               <a:t>WELCOME (1 min) — while students join.
 • Greet each student by name as they arrive: السَّلَامُ عَلَيْكُمْ. Take the register (Pastoral Tracker: attendance 0/1).
 • 2-MINUTE CHECK-IN (SEND training): a private chat to any student who seemed unsettled last lesson — “Are you okay today? 👍 / 👎”.
@@ -2224,7 +2248,11 @@
           <a:lstStyle/>
           <a:p>
             <a:r>
-              <a:rPr lang="en-US" dirty="0"/>
+              <a:rPr lang="ar-SA" dirty="0">
+                <a:latin typeface="Amiri" pitchFamily="2" charset="-78"/>
+                <a:ea typeface="Amiri" pitchFamily="2" charset="-78"/>
+                <a:cs typeface="Amiri" pitchFamily="2" charset="-78"/>
+              </a:rPr>
               <a:t>TEACH (3 min). Role play = precise and complete; conversation = develop. Choral repetition of the repair phrases. To a girl: تُعِيدِي.</a:t>
             </a:r>
             <a:endParaRPr lang="en-US" dirty="0"/>
@@ -2312,7 +2340,11 @@
           <a:lstStyle/>
           <a:p>
             <a:r>
-              <a:rPr lang="en-US" dirty="0"/>
+              <a:rPr lang="ar-SA" dirty="0">
+                <a:latin typeface="Amiri" pitchFamily="2" charset="-78"/>
+                <a:ea typeface="Amiri" pitchFamily="2" charset="-78"/>
+                <a:cs typeface="Amiri" pitchFamily="2" charset="-78"/>
+              </a:rPr>
               <a:t>LANGUAGE BANK (2 min) — singular, dual and plural: the dual is common with time (سَاعَتَانِ · أُسْبُوعَانِ). Chant sg → dual → pl for each word.</a:t>
             </a:r>
             <a:endParaRPr lang="en-US" dirty="0"/>
@@ -2400,7 +2432,11 @@
           <a:lstStyle/>
           <a:p>
             <a:r>
-              <a:rPr lang="en-US" dirty="0"/>
+              <a:rPr lang="ar-SA" dirty="0">
+                <a:latin typeface="Amiri" pitchFamily="2" charset="-78"/>
+                <a:ea typeface="Amiri" pitchFamily="2" charset="-78"/>
+                <a:cs typeface="Amiri" pitchFamily="2" charset="-78"/>
+              </a:rPr>
               <a:t>LANGUAGE BANK (2 min) — ordinals agree with the noun: اليَوْمُ الأَوَّلُ / الحِصَّةُ الأُولَى. Dates: فِي الخَامِسِ مِنْ مَايُو (on the fifth of May). Clock times use the feminine ordinal: السَّاعَةُ الثَّالِثَةُ.</a:t>
             </a:r>
             <a:endParaRPr lang="en-US" dirty="0"/>
@@ -2576,7 +2612,11 @@
           <a:lstStyle/>
           <a:p>
             <a:r>
-              <a:rPr lang="en-US" dirty="0"/>
+              <a:rPr lang="ar-SA" dirty="0">
+                <a:latin typeface="Amiri" pitchFamily="2" charset="-78"/>
+                <a:ea typeface="Amiri" pitchFamily="2" charset="-78"/>
+                <a:cs typeface="Amiri" pitchFamily="2" charset="-78"/>
+              </a:rPr>
               <a:t>ROLE PLAY A (Core) — at the sports centre.
 SET-UP IN THE BREAKOUT ROOM: A = examiner (reads the left column ONLY — the questions, in order), B = candidate (sees the task column; Core may use the help column), C = observer (ticks the feedback checklist). 1 minute preparation, about 3 minutes speaking, 1 minute feedback, then rotate.
 Task ! is the unexpected question: in the exam the candidate has not seen it — the examiner should read it without warning.
@@ -2668,7 +2708,11 @@
           <a:lstStyle/>
           <a:p>
             <a:r>
-              <a:rPr lang="en-US" dirty="0"/>
+              <a:rPr lang="ar-SA" dirty="0">
+                <a:latin typeface="Amiri" pitchFamily="2" charset="-78"/>
+                <a:ea typeface="Amiri" pitchFamily="2" charset="-78"/>
+                <a:cs typeface="Amiri" pitchFamily="2" charset="-78"/>
+              </a:rPr>
               <a:t>ROLE PLAY B (Core+) — a phone call with a friend.
 SET-UP IN THE BREAKOUT ROOM: A = examiner (reads the left column ONLY — the questions, in order), B = candidate (sees the task column; Core may use the help column), C = observer (ticks the feedback checklist). 1 minute preparation, about 3 minutes speaking, 1 minute feedback, then rotate.
 Task ! is the unexpected question: in the exam the candidate has not seen it — the examiner should read it without warning.
@@ -3156,6 +3200,7 @@
                   <a:srgbClr val="D4AF37"/>
                 </a:solidFill>
                 <a:latin typeface="Amiri" pitchFamily="2" charset="-78"/>
+                <a:ea typeface="Amiri" pitchFamily="2" charset="-78"/>
                 <a:cs typeface="Amiri" pitchFamily="2" charset="-78"/>
               </a:rPr>
               <a:t>م</a:t>
@@ -3362,6 +3407,7 @@
                   <a:srgbClr val="D4AF37"/>
                 </a:solidFill>
                 <a:latin typeface="Amiri" pitchFamily="2" charset="-78"/>
+                <a:ea typeface="Amiri" pitchFamily="2" charset="-78"/>
                 <a:cs typeface="Amiri" pitchFamily="2" charset="-78"/>
               </a:rPr>
               <a:t>وَرْشَةُ التَّحَدُّثِ — التَّقْوِيمُ وَالأُسْبُوعُ الدِّرَاسِيُّ</a:t>
@@ -3819,6 +3865,7 @@
                   <a:srgbClr val="D4AF37"/>
                 </a:solidFill>
                 <a:latin typeface="Amiri" pitchFamily="2" charset="-78"/>
+                <a:ea typeface="Amiri" pitchFamily="2" charset="-78"/>
                 <a:cs typeface="Amiri" pitchFamily="2" charset="-78"/>
               </a:rPr>
               <a:t>م</a:t>
@@ -4139,6 +4186,7 @@
                   <a:srgbClr val="8A6D1E"/>
                 </a:solidFill>
                 <a:latin typeface="Amiri" pitchFamily="2" charset="-78"/>
+                <a:ea typeface="Amiri" pitchFamily="2" charset="-78"/>
                 <a:cs typeface="Amiri" pitchFamily="2" charset="-78"/>
               </a:rPr>
               <a:t>أُسْبُوعِي الدِّرَاسِيُّ</a:t>
@@ -4419,6 +4467,7 @@
                   <a:srgbClr val="1B3B6F"/>
                 </a:solidFill>
                 <a:latin typeface="Amiri" pitchFamily="2" charset="-78"/>
+                <a:ea typeface="Amiri" pitchFamily="2" charset="-78"/>
                 <a:cs typeface="Amiri" pitchFamily="2" charset="-78"/>
               </a:rPr>
               <a:t>أَدْرُسُ … أَيَّامٍ، مِنْ … إِلَى …</a:t>
@@ -4495,6 +4544,7 @@
                   <a:srgbClr val="1B3B6F"/>
                 </a:solidFill>
                 <a:latin typeface="Amiri" pitchFamily="2" charset="-78"/>
+                <a:ea typeface="Amiri" pitchFamily="2" charset="-78"/>
                 <a:cs typeface="Amiri" pitchFamily="2" charset="-78"/>
               </a:rPr>
               <a:t>كَمْ يَوْمًا تَدْرُسُ فِي الأُسْبُوعِ؟</a:t>
@@ -4598,6 +4648,7 @@
                   <a:srgbClr val="1B3B6F"/>
                 </a:solidFill>
                 <a:latin typeface="Amiri" pitchFamily="2" charset="-78"/>
+                <a:ea typeface="Amiri" pitchFamily="2" charset="-78"/>
                 <a:cs typeface="Amiri" pitchFamily="2" charset="-78"/>
               </a:rPr>
               <a:t>يَبْدَأُ فِي … وَالرُّبْعِ</a:t>
@@ -4674,6 +4725,7 @@
                   <a:srgbClr val="1B3B6F"/>
                 </a:solidFill>
                 <a:latin typeface="Amiri" pitchFamily="2" charset="-78"/>
+                <a:ea typeface="Amiri" pitchFamily="2" charset="-78"/>
                 <a:cs typeface="Amiri" pitchFamily="2" charset="-78"/>
               </a:rPr>
               <a:t>مَتَى يَبْدَأُ اليَوْمُ الدِّرَاسِيُّ، وَمَتَى يَنْتَهِي؟</a:t>
@@ -4777,6 +4829,7 @@
                   <a:srgbClr val="1B3B6F"/>
                 </a:solidFill>
                 <a:latin typeface="Amiri" pitchFamily="2" charset="-78"/>
+                <a:ea typeface="Amiri" pitchFamily="2" charset="-78"/>
                 <a:cs typeface="Amiri" pitchFamily="2" charset="-78"/>
               </a:rPr>
               <a:t>عِنْدِي … حِصَصٍ، وَكُلُّ حِصَّةٍ …</a:t>
@@ -4853,6 +4906,7 @@
                   <a:srgbClr val="1B3B6F"/>
                 </a:solidFill>
                 <a:latin typeface="Amiri" pitchFamily="2" charset="-78"/>
+                <a:ea typeface="Amiri" pitchFamily="2" charset="-78"/>
                 <a:cs typeface="Amiri" pitchFamily="2" charset="-78"/>
               </a:rPr>
               <a:t>كَمْ حِصَّةً عِنْدَكَ فِي اليَوْمِ؟</a:t>
@@ -4956,6 +5010,7 @@
                   <a:srgbClr val="1B3B6F"/>
                 </a:solidFill>
                 <a:latin typeface="Amiri" pitchFamily="2" charset="-78"/>
+                <a:ea typeface="Amiri" pitchFamily="2" charset="-78"/>
                 <a:cs typeface="Amiri" pitchFamily="2" charset="-78"/>
               </a:rPr>
               <a:t>مَتَى تَبْدَأُ العُطْلَةُ …؟</a:t>
@@ -5032,6 +5087,7 @@
                   <a:srgbClr val="1B3B6F"/>
                 </a:solidFill>
                 <a:latin typeface="Amiri" pitchFamily="2" charset="-78"/>
+                <a:ea typeface="Amiri" pitchFamily="2" charset="-78"/>
                 <a:cs typeface="Amiri" pitchFamily="2" charset="-78"/>
               </a:rPr>
               <a:t>… تَبْدَأُ فِي أَوَّلِ يُولْيُو.</a:t>
@@ -5135,6 +5191,7 @@
                   <a:srgbClr val="1B3B6F"/>
                 </a:solidFill>
                 <a:latin typeface="Amiri" pitchFamily="2" charset="-78"/>
+                <a:ea typeface="Amiri" pitchFamily="2" charset="-78"/>
                 <a:cs typeface="Amiri" pitchFamily="2" charset="-78"/>
               </a:rPr>
               <a:t>يَوْمِي المُفَضَّلُ … لِأَنَّ …</a:t>
@@ -5211,6 +5268,7 @@
                   <a:srgbClr val="1B3B6F"/>
                 </a:solidFill>
                 <a:latin typeface="Amiri" pitchFamily="2" charset="-78"/>
+                <a:ea typeface="Amiri" pitchFamily="2" charset="-78"/>
                 <a:cs typeface="Amiri" pitchFamily="2" charset="-78"/>
               </a:rPr>
               <a:t>مَا يَوْمُكَ المُفَضَّلُ فِي الأُسْبُوعِ؟ وَلِمَاذَا؟</a:t>
@@ -5420,6 +5478,7 @@
                   <a:srgbClr val="D4AF37"/>
                 </a:solidFill>
                 <a:latin typeface="Amiri" pitchFamily="2" charset="-78"/>
+                <a:ea typeface="Amiri" pitchFamily="2" charset="-78"/>
                 <a:cs typeface="Amiri" pitchFamily="2" charset="-78"/>
               </a:rPr>
               <a:t>م</a:t>
@@ -5740,6 +5799,7 @@
                   <a:srgbClr val="8A6D1E"/>
                 </a:solidFill>
                 <a:latin typeface="Amiri" pitchFamily="2" charset="-78"/>
+                <a:ea typeface="Amiri" pitchFamily="2" charset="-78"/>
                 <a:cs typeface="Amiri" pitchFamily="2" charset="-78"/>
               </a:rPr>
               <a:t>مَجْلِسُ الطُّلَّابِ</a:t>
@@ -6020,6 +6080,7 @@
                   <a:srgbClr val="1B3B6F"/>
                 </a:solidFill>
                 <a:latin typeface="Amiri" pitchFamily="2" charset="-78"/>
+                <a:ea typeface="Amiri" pitchFamily="2" charset="-78"/>
                 <a:cs typeface="Amiri" pitchFamily="2" charset="-78"/>
               </a:rPr>
               <a:t>أَطْوَلُ يَوْمٍ … وَأَقْصَرُهُ …</a:t>
@@ -6096,6 +6157,7 @@
                   <a:srgbClr val="1B3B6F"/>
                 </a:solidFill>
                 <a:latin typeface="Amiri" pitchFamily="2" charset="-78"/>
+                <a:ea typeface="Amiri" pitchFamily="2" charset="-78"/>
                 <a:cs typeface="Amiri" pitchFamily="2" charset="-78"/>
               </a:rPr>
               <a:t>صِفْ أُسْبُوعَكَ الدِّرَاسِيَّ بِاخْتِصَارٍ.</a:t>
@@ -6199,6 +6261,7 @@
                   <a:srgbClr val="1B3B6F"/>
                 </a:solidFill>
                 <a:latin typeface="Amiri" pitchFamily="2" charset="-78"/>
+                <a:ea typeface="Amiri" pitchFamily="2" charset="-78"/>
                 <a:cs typeface="Amiri" pitchFamily="2" charset="-78"/>
               </a:rPr>
               <a:t>فِي شَهْرِ … سَافَرْتُ …</a:t>
@@ -6275,6 +6338,7 @@
                   <a:srgbClr val="1B3B6F"/>
                 </a:solidFill>
                 <a:latin typeface="Amiri" pitchFamily="2" charset="-78"/>
+                <a:ea typeface="Amiri" pitchFamily="2" charset="-78"/>
                 <a:cs typeface="Amiri" pitchFamily="2" charset="-78"/>
               </a:rPr>
               <a:t>مَاذَا فَعَلْتَ فِي العُطْلَةِ الأَخِيرَةِ؟</a:t>
@@ -6378,6 +6442,7 @@
                   <a:srgbClr val="1B3B6F"/>
                 </a:solidFill>
                 <a:latin typeface="Amiri" pitchFamily="2" charset="-78"/>
+                <a:ea typeface="Amiri" pitchFamily="2" charset="-78"/>
                 <a:cs typeface="Amiri" pitchFamily="2" charset="-78"/>
               </a:rPr>
               <a:t>أُفَضِّلُ أَنْ يَبْدَأَ … لِأَنَّ …</a:t>
@@ -6454,6 +6519,7 @@
                   <a:srgbClr val="1B3B6F"/>
                 </a:solidFill>
                 <a:latin typeface="Amiri" pitchFamily="2" charset="-78"/>
+                <a:ea typeface="Amiri" pitchFamily="2" charset="-78"/>
                 <a:cs typeface="Amiri" pitchFamily="2" charset="-78"/>
               </a:rPr>
               <a:t>هَلْ تُفَضِّلُ أَنْ يَبْدَأَ اليَوْمُ مُبَكِّرًا أَمْ مُتَأَخِّرًا؟ لِمَاذَا؟</a:t>
@@ -6557,6 +6623,7 @@
                   <a:srgbClr val="1B3B6F"/>
                 </a:solidFill>
                 <a:latin typeface="Amiri" pitchFamily="2" charset="-78"/>
+                <a:ea typeface="Amiri" pitchFamily="2" charset="-78"/>
                 <a:cs typeface="Amiri" pitchFamily="2" charset="-78"/>
               </a:rPr>
               <a:t>أَهَمُّ تَارِيخٍ عِنْدِي … لِأَنَّ …</a:t>
@@ -6633,6 +6700,7 @@
                   <a:srgbClr val="1B3B6F"/>
                 </a:solidFill>
                 <a:latin typeface="Amiri" pitchFamily="2" charset="-78"/>
+                <a:ea typeface="Amiri" pitchFamily="2" charset="-78"/>
                 <a:cs typeface="Amiri" pitchFamily="2" charset="-78"/>
               </a:rPr>
               <a:t>مَا أَهَمُّ تَارِيخٍ فِي سَنَتِكَ؟ وَلِمَاذَا؟</a:t>
@@ -6736,6 +6804,7 @@
                   <a:srgbClr val="1B3B6F"/>
                 </a:solidFill>
                 <a:latin typeface="Amiri" pitchFamily="2" charset="-78"/>
+                <a:ea typeface="Amiri" pitchFamily="2" charset="-78"/>
                 <a:cs typeface="Amiri" pitchFamily="2" charset="-78"/>
               </a:rPr>
               <a:t>سَأَكْتُبُ … وَسَأُرَاجِعُ …</a:t>
@@ -6812,6 +6881,7 @@
                   <a:srgbClr val="1B3B6F"/>
                 </a:solidFill>
                 <a:latin typeface="Amiri" pitchFamily="2" charset="-78"/>
+                <a:ea typeface="Amiri" pitchFamily="2" charset="-78"/>
                 <a:cs typeface="Amiri" pitchFamily="2" charset="-78"/>
               </a:rPr>
               <a:t>كَيْفَ سَتُنَظِّمُ وَقْتَكَ فِي الشَّهْرِ القَادِمِ؟</a:t>
@@ -7021,6 +7091,7 @@
                   <a:srgbClr val="D4AF37"/>
                 </a:solidFill>
                 <a:latin typeface="Amiri" pitchFamily="2" charset="-78"/>
+                <a:ea typeface="Amiri" pitchFamily="2" charset="-78"/>
                 <a:cs typeface="Amiri" pitchFamily="2" charset="-78"/>
               </a:rPr>
               <a:t>م</a:t>
@@ -7341,6 +7412,7 @@
                   <a:srgbClr val="8A6D1E"/>
                 </a:solidFill>
                 <a:latin typeface="Amiri" pitchFamily="2" charset="-78"/>
+                <a:ea typeface="Amiri" pitchFamily="2" charset="-78"/>
                 <a:cs typeface="Amiri" pitchFamily="2" charset="-78"/>
               </a:rPr>
               <a:t>وَرَقَةُ المُلَاحِظِ</a:t>
@@ -8811,6 +8883,7 @@
                   <a:srgbClr val="D4AF37"/>
                 </a:solidFill>
                 <a:latin typeface="Amiri" pitchFamily="2" charset="-78"/>
+                <a:ea typeface="Amiri" pitchFamily="2" charset="-78"/>
                 <a:cs typeface="Amiri" pitchFamily="2" charset="-78"/>
               </a:rPr>
               <a:t>م</a:t>
@@ -9131,6 +9204,7 @@
                   <a:srgbClr val="8A6D1E"/>
                 </a:solidFill>
                 <a:latin typeface="Amiri" pitchFamily="2" charset="-78"/>
+                <a:ea typeface="Amiri" pitchFamily="2" charset="-78"/>
                 <a:cs typeface="Amiri" pitchFamily="2" charset="-78"/>
               </a:rPr>
               <a:t>نَمُوذَجُ الإِجَابَةِ</a:t>
@@ -9373,6 +9447,7 @@
                   <a:srgbClr val="1B3B6F"/>
                 </a:solidFill>
                 <a:latin typeface="Amiri" pitchFamily="2" charset="-78"/>
+                <a:ea typeface="Amiri" pitchFamily="2" charset="-78"/>
                 <a:cs typeface="Amiri" pitchFamily="2" charset="-78"/>
               </a:rPr>
               <a:t>اسْمِي يُوسُفُ عَلِيٌّ.</a:t>
@@ -9449,6 +9524,7 @@
                   <a:srgbClr val="1B3B6F"/>
                 </a:solidFill>
                 <a:latin typeface="Amiri" pitchFamily="2" charset="-78"/>
+                <a:ea typeface="Amiri" pitchFamily="2" charset="-78"/>
                 <a:cs typeface="Amiri" pitchFamily="2" charset="-78"/>
               </a:rPr>
               <a:t>صَبَاحَ الخَيْرِ! مَا اسْمُكَ؟</a:t>
@@ -9552,6 +9628,7 @@
                   <a:srgbClr val="1B3B6F"/>
                 </a:solidFill>
                 <a:latin typeface="Amiri" pitchFamily="2" charset="-78"/>
+                <a:ea typeface="Amiri" pitchFamily="2" charset="-78"/>
                 <a:cs typeface="Amiri" pitchFamily="2" charset="-78"/>
               </a:rPr>
               <a:t>أُرِيدُ الدَّرْسَ يَوْمَ السَّبْتِ، مِنْ فَضْلِكَ.</a:t>
@@ -9628,6 +9705,7 @@
                   <a:srgbClr val="1B3B6F"/>
                 </a:solidFill>
                 <a:latin typeface="Amiri" pitchFamily="2" charset="-78"/>
+                <a:ea typeface="Amiri" pitchFamily="2" charset="-78"/>
                 <a:cs typeface="Amiri" pitchFamily="2" charset="-78"/>
               </a:rPr>
               <a:t>أَيَّ يَوْمٍ تُرِيدُ الدَّرْسَ؟</a:t>
@@ -9731,6 +9809,7 @@
                   <a:srgbClr val="1B3B6F"/>
                 </a:solidFill>
                 <a:latin typeface="Amiri" pitchFamily="2" charset="-78"/>
+                <a:ea typeface="Amiri" pitchFamily="2" charset="-78"/>
                 <a:cs typeface="Amiri" pitchFamily="2" charset="-78"/>
               </a:rPr>
               <a:t>فِي السَّاعَةِ العَاشِرَةِ صَبَاحًا.</a:t>
@@ -9807,6 +9886,7 @@
                   <a:srgbClr val="1B3B6F"/>
                 </a:solidFill>
                 <a:latin typeface="Amiri" pitchFamily="2" charset="-78"/>
+                <a:ea typeface="Amiri" pitchFamily="2" charset="-78"/>
                 <a:cs typeface="Amiri" pitchFamily="2" charset="-78"/>
               </a:rPr>
               <a:t>فِي أَيِّ سَاعَةٍ؟</a:t>
@@ -9910,6 +9990,7 @@
                   <a:srgbClr val="1B3B6F"/>
                 </a:solidFill>
                 <a:latin typeface="Amiri" pitchFamily="2" charset="-78"/>
+                <a:ea typeface="Amiri" pitchFamily="2" charset="-78"/>
                 <a:cs typeface="Amiri" pitchFamily="2" charset="-78"/>
               </a:rPr>
               <a:t>تَارِيخُ مِيلَادِي هُوَ الخَامِسُ مِنْ مَايُو.</a:t>
@@ -9986,6 +10067,7 @@
                   <a:srgbClr val="1B3B6F"/>
                 </a:solidFill>
                 <a:latin typeface="Amiri" pitchFamily="2" charset="-78"/>
+                <a:ea typeface="Amiri" pitchFamily="2" charset="-78"/>
                 <a:cs typeface="Amiri" pitchFamily="2" charset="-78"/>
               </a:rPr>
               <a:t>مَا تَارِيخُ مِيلَادِكَ؟</a:t>
@@ -10089,6 +10171,7 @@
                   <a:srgbClr val="1B3B6F"/>
                 </a:solidFill>
                 <a:latin typeface="Amiri" pitchFamily="2" charset="-78"/>
+                <a:ea typeface="Amiri" pitchFamily="2" charset="-78"/>
                 <a:cs typeface="Amiri" pitchFamily="2" charset="-78"/>
               </a:rPr>
               <a:t>نَعَمْ، يُنَاسِبُنِي الأُسْبُوعُ القَادِمُ، شُكْرًا.</a:t>
@@ -10165,6 +10248,7 @@
                   <a:srgbClr val="1B3B6F"/>
                 </a:solidFill>
                 <a:latin typeface="Amiri" pitchFamily="2" charset="-78"/>
+                <a:ea typeface="Amiri" pitchFamily="2" charset="-78"/>
                 <a:cs typeface="Amiri" pitchFamily="2" charset="-78"/>
               </a:rPr>
               <a:t>هَلْ يُنَاسِبُكَ الأُسْبُوعُ القَادِمُ؟</a:t>
@@ -10374,6 +10458,7 @@
                   <a:srgbClr val="D4AF37"/>
                 </a:solidFill>
                 <a:latin typeface="Amiri" pitchFamily="2" charset="-78"/>
+                <a:ea typeface="Amiri" pitchFamily="2" charset="-78"/>
                 <a:cs typeface="Amiri" pitchFamily="2" charset="-78"/>
               </a:rPr>
               <a:t>م</a:t>
@@ -10694,6 +10779,7 @@
                   <a:srgbClr val="8A6D1E"/>
                 </a:solidFill>
                 <a:latin typeface="Amiri" pitchFamily="2" charset="-78"/>
+                <a:ea typeface="Amiri" pitchFamily="2" charset="-78"/>
                 <a:cs typeface="Amiri" pitchFamily="2" charset="-78"/>
               </a:rPr>
               <a:t>نَمُوذَجُ الإِجَابَةِ</a:t>
@@ -10936,6 +11022,7 @@
                   <a:srgbClr val="1B3B6F"/>
                 </a:solidFill>
                 <a:latin typeface="Amiri" pitchFamily="2" charset="-78"/>
+                <a:ea typeface="Amiri" pitchFamily="2" charset="-78"/>
                 <a:cs typeface="Amiri" pitchFamily="2" charset="-78"/>
               </a:rPr>
               <a:t>عِيدُ مِيلَادِي فِي العَاشِرِ مِنْ نُوفَمْبَرَ.</a:t>
@@ -11012,6 +11099,7 @@
                   <a:srgbClr val="1B3B6F"/>
                 </a:solidFill>
                 <a:latin typeface="Amiri" pitchFamily="2" charset="-78"/>
+                <a:ea typeface="Amiri" pitchFamily="2" charset="-78"/>
                 <a:cs typeface="Amiri" pitchFamily="2" charset="-78"/>
               </a:rPr>
               <a:t>مَتَى عِيدُ مِيلَادِكَ؟</a:t>
@@ -11115,6 +11203,7 @@
                   <a:srgbClr val="1B3B6F"/>
                 </a:solidFill>
                 <a:latin typeface="Amiri" pitchFamily="2" charset="-78"/>
+                <a:ea typeface="Amiri" pitchFamily="2" charset="-78"/>
                 <a:cs typeface="Amiri" pitchFamily="2" charset="-78"/>
               </a:rPr>
               <a:t>الحَفْلَةُ يَوْمَ الجُمُعَةِ بَعْدَ المَدْرَسَةِ.</a:t>
@@ -11191,6 +11280,7 @@
                   <a:srgbClr val="1B3B6F"/>
                 </a:solidFill>
                 <a:latin typeface="Amiri" pitchFamily="2" charset="-78"/>
+                <a:ea typeface="Amiri" pitchFamily="2" charset="-78"/>
                 <a:cs typeface="Amiri" pitchFamily="2" charset="-78"/>
               </a:rPr>
               <a:t>فِي أَيِّ يَوْمٍ الحَفْلَةُ؟</a:t>
@@ -11294,6 +11384,7 @@
                   <a:srgbClr val="1B3B6F"/>
                 </a:solidFill>
                 <a:latin typeface="Amiri" pitchFamily="2" charset="-78"/>
+                <a:ea typeface="Amiri" pitchFamily="2" charset="-78"/>
                 <a:cs typeface="Amiri" pitchFamily="2" charset="-78"/>
               </a:rPr>
               <a:t>تَبْدَأُ فِي السَّاعَةِ الرَّابِعَةِ، وَتَنْتَهِي فِي السَّابِعَةِ.</a:t>
@@ -11370,6 +11461,7 @@
                   <a:srgbClr val="1B3B6F"/>
                 </a:solidFill>
                 <a:latin typeface="Amiri" pitchFamily="2" charset="-78"/>
+                <a:ea typeface="Amiri" pitchFamily="2" charset="-78"/>
                 <a:cs typeface="Amiri" pitchFamily="2" charset="-78"/>
               </a:rPr>
               <a:t>مَتَى تَبْدَأُ، وَمَتَى تَنْتَهِي؟</a:t>
@@ -11473,6 +11565,7 @@
                   <a:srgbClr val="1B3B6F"/>
                 </a:solidFill>
                 <a:latin typeface="Amiri" pitchFamily="2" charset="-78"/>
+                <a:ea typeface="Amiri" pitchFamily="2" charset="-78"/>
                 <a:cs typeface="Amiri" pitchFamily="2" charset="-78"/>
               </a:rPr>
               <a:t>هَلْ أَنْتَ مُتَفَرِّغٌ يَوْمَ الجُمُعَةِ؟</a:t>
@@ -11549,6 +11642,7 @@
                   <a:srgbClr val="1B3B6F"/>
                 </a:solidFill>
                 <a:latin typeface="Amiri" pitchFamily="2" charset="-78"/>
+                <a:ea typeface="Amiri" pitchFamily="2" charset="-78"/>
                 <a:cs typeface="Amiri" pitchFamily="2" charset="-78"/>
               </a:rPr>
               <a:t>… نَعَمْ، أَنَا مُتَفَرِّغٌ بَعْدَ العَصْرِ.</a:t>
@@ -11652,6 +11746,7 @@
                   <a:srgbClr val="1B3B6F"/>
                 </a:solidFill>
                 <a:latin typeface="Amiri" pitchFamily="2" charset="-78"/>
+                <a:ea typeface="Amiri" pitchFamily="2" charset="-78"/>
                 <a:cs typeface="Amiri" pitchFamily="2" charset="-78"/>
               </a:rPr>
               <a:t>سَنَأْكُلُ الكَعْكَةَ، وَنَلْعَبُ أَلْعَابًا مُمْتِعَةً فِي الحَدِيقَةِ.</a:t>
@@ -11728,6 +11823,7 @@
                   <a:srgbClr val="1B3B6F"/>
                 </a:solidFill>
                 <a:latin typeface="Amiri" pitchFamily="2" charset="-78"/>
+                <a:ea typeface="Amiri" pitchFamily="2" charset="-78"/>
                 <a:cs typeface="Amiri" pitchFamily="2" charset="-78"/>
               </a:rPr>
               <a:t>مَاذَا سَنَفْعَلُ فِي الحَفْلَةِ؟</a:t>
@@ -11937,6 +12033,7 @@
                   <a:srgbClr val="D4AF37"/>
                 </a:solidFill>
                 <a:latin typeface="Amiri" pitchFamily="2" charset="-78"/>
+                <a:ea typeface="Amiri" pitchFamily="2" charset="-78"/>
                 <a:cs typeface="Amiri" pitchFamily="2" charset="-78"/>
               </a:rPr>
               <a:t>م</a:t>
@@ -12257,6 +12354,7 @@
                   <a:srgbClr val="8A6D1E"/>
                 </a:solidFill>
                 <a:latin typeface="Amiri" pitchFamily="2" charset="-78"/>
+                <a:ea typeface="Amiri" pitchFamily="2" charset="-78"/>
                 <a:cs typeface="Amiri" pitchFamily="2" charset="-78"/>
               </a:rPr>
               <a:t>نَمُوذَجُ الإِجَابَةِ</a:t>
@@ -12499,6 +12597,7 @@
                   <a:srgbClr val="1B3B6F"/>
                 </a:solidFill>
                 <a:latin typeface="Amiri" pitchFamily="2" charset="-78"/>
+                <a:ea typeface="Amiri" pitchFamily="2" charset="-78"/>
                 <a:cs typeface="Amiri" pitchFamily="2" charset="-78"/>
               </a:rPr>
               <a:t>أَدْرُسُ خَمْسَةَ أَيَّامٍ، مِنَ الإِثْنَيْنِ إِلَى الجُمُعَةِ.</a:t>
@@ -12575,6 +12674,7 @@
                   <a:srgbClr val="1B3B6F"/>
                 </a:solidFill>
                 <a:latin typeface="Amiri" pitchFamily="2" charset="-78"/>
+                <a:ea typeface="Amiri" pitchFamily="2" charset="-78"/>
                 <a:cs typeface="Amiri" pitchFamily="2" charset="-78"/>
               </a:rPr>
               <a:t>كَمْ يَوْمًا تَدْرُسُ فِي الأُسْبُوعِ؟</a:t>
@@ -12678,6 +12778,7 @@
                   <a:srgbClr val="1B3B6F"/>
                 </a:solidFill>
                 <a:latin typeface="Amiri" pitchFamily="2" charset="-78"/>
+                <a:ea typeface="Amiri" pitchFamily="2" charset="-78"/>
                 <a:cs typeface="Amiri" pitchFamily="2" charset="-78"/>
               </a:rPr>
               <a:t>يَبْدَأُ فِي الثَّامِنَةِ وَالرُّبْعِ، وَيَنْتَهِي فِي الثَّالِثَةِ وَالنِّصْفِ.</a:t>
@@ -12754,6 +12855,7 @@
                   <a:srgbClr val="1B3B6F"/>
                 </a:solidFill>
                 <a:latin typeface="Amiri" pitchFamily="2" charset="-78"/>
+                <a:ea typeface="Amiri" pitchFamily="2" charset="-78"/>
                 <a:cs typeface="Amiri" pitchFamily="2" charset="-78"/>
               </a:rPr>
               <a:t>مَتَى يَبْدَأُ اليَوْمُ الدِّرَاسِيُّ، وَمَتَى يَنْتَهِي؟</a:t>
@@ -12857,6 +12959,7 @@
                   <a:srgbClr val="1B3B6F"/>
                 </a:solidFill>
                 <a:latin typeface="Amiri" pitchFamily="2" charset="-78"/>
+                <a:ea typeface="Amiri" pitchFamily="2" charset="-78"/>
                 <a:cs typeface="Amiri" pitchFamily="2" charset="-78"/>
               </a:rPr>
               <a:t>عِنْدِي سِتُّ حِصَصٍ، وَكُلُّ حِصَّةٍ خَمْسُونَ دَقِيقَةً.</a:t>
@@ -12933,6 +13036,7 @@
                   <a:srgbClr val="1B3B6F"/>
                 </a:solidFill>
                 <a:latin typeface="Amiri" pitchFamily="2" charset="-78"/>
+                <a:ea typeface="Amiri" pitchFamily="2" charset="-78"/>
                 <a:cs typeface="Amiri" pitchFamily="2" charset="-78"/>
               </a:rPr>
               <a:t>كَمْ حِصَّةً عِنْدَكَ فِي اليَوْمِ؟</a:t>
@@ -13036,6 +13140,7 @@
                   <a:srgbClr val="1B3B6F"/>
                 </a:solidFill>
                 <a:latin typeface="Amiri" pitchFamily="2" charset="-78"/>
+                <a:ea typeface="Amiri" pitchFamily="2" charset="-78"/>
                 <a:cs typeface="Amiri" pitchFamily="2" charset="-78"/>
               </a:rPr>
               <a:t>مَتَى تَبْدَأُ العُطْلَةُ الصَّيْفِيَّةُ عِنْدَكُمْ؟</a:t>
@@ -13112,6 +13217,7 @@
                   <a:srgbClr val="1B3B6F"/>
                 </a:solidFill>
                 <a:latin typeface="Amiri" pitchFamily="2" charset="-78"/>
+                <a:ea typeface="Amiri" pitchFamily="2" charset="-78"/>
                 <a:cs typeface="Amiri" pitchFamily="2" charset="-78"/>
               </a:rPr>
               <a:t>… تَبْدَأُ فِي أَوَّلِ يُولْيُو.</a:t>
@@ -13215,6 +13321,7 @@
                   <a:srgbClr val="1B3B6F"/>
                 </a:solidFill>
                 <a:latin typeface="Amiri" pitchFamily="2" charset="-78"/>
+                <a:ea typeface="Amiri" pitchFamily="2" charset="-78"/>
                 <a:cs typeface="Amiri" pitchFamily="2" charset="-78"/>
               </a:rPr>
               <a:t>يَوْمِي المُفَضَّلُ هُوَ الخَمِيسُ، لِأَنَّ عِنْدِي حِصَّتَيْنِ مِنَ الرِّيَاضَةِ.</a:t>
@@ -13291,6 +13398,7 @@
                   <a:srgbClr val="1B3B6F"/>
                 </a:solidFill>
                 <a:latin typeface="Amiri" pitchFamily="2" charset="-78"/>
+                <a:ea typeface="Amiri" pitchFamily="2" charset="-78"/>
                 <a:cs typeface="Amiri" pitchFamily="2" charset="-78"/>
               </a:rPr>
               <a:t>مَا يَوْمُكَ المُفَضَّلُ فِي الأُسْبُوعِ؟ وَلِمَاذَا؟</a:t>
@@ -13500,6 +13608,7 @@
                   <a:srgbClr val="D4AF37"/>
                 </a:solidFill>
                 <a:latin typeface="Amiri" pitchFamily="2" charset="-78"/>
+                <a:ea typeface="Amiri" pitchFamily="2" charset="-78"/>
                 <a:cs typeface="Amiri" pitchFamily="2" charset="-78"/>
               </a:rPr>
               <a:t>م</a:t>
@@ -13820,6 +13929,7 @@
                   <a:srgbClr val="8A6D1E"/>
                 </a:solidFill>
                 <a:latin typeface="Amiri" pitchFamily="2" charset="-78"/>
+                <a:ea typeface="Amiri" pitchFamily="2" charset="-78"/>
                 <a:cs typeface="Amiri" pitchFamily="2" charset="-78"/>
               </a:rPr>
               <a:t>نَمُوذَجُ الإِجَابَةِ</a:t>
@@ -14062,6 +14172,7 @@
                   <a:srgbClr val="1B3B6F"/>
                 </a:solidFill>
                 <a:latin typeface="Amiri" pitchFamily="2" charset="-78"/>
+                <a:ea typeface="Amiri" pitchFamily="2" charset="-78"/>
                 <a:cs typeface="Amiri" pitchFamily="2" charset="-78"/>
               </a:rPr>
               <a:t>أَدْرُسُ مِنَ الإِثْنَيْنِ إِلَى الجُمُعَةِ؛ أَطْوَلُ يَوْمٍ هُوَ الثُّلَاثَاءُ لِأَنَّ عِنْدِي سَبْعَ حِصَصٍ، وَأَقْصَرُهُ الجُمُعَةُ.</a:t>
@@ -14138,6 +14249,7 @@
                   <a:srgbClr val="1B3B6F"/>
                 </a:solidFill>
                 <a:latin typeface="Amiri" pitchFamily="2" charset="-78"/>
+                <a:ea typeface="Amiri" pitchFamily="2" charset="-78"/>
                 <a:cs typeface="Amiri" pitchFamily="2" charset="-78"/>
               </a:rPr>
               <a:t>صِفْ أُسْبُوعَكَ الدِّرَاسِيَّ بِاخْتِصَارٍ.</a:t>
@@ -14241,6 +14353,7 @@
                   <a:srgbClr val="1B3B6F"/>
                 </a:solidFill>
                 <a:latin typeface="Amiri" pitchFamily="2" charset="-78"/>
+                <a:ea typeface="Amiri" pitchFamily="2" charset="-78"/>
                 <a:cs typeface="Amiri" pitchFamily="2" charset="-78"/>
               </a:rPr>
               <a:t>فِي العُطْلَةِ الأَخِيرَةِ، فِي شَهْرِ أَبْرِيلَ، سَافَرْتُ إِلَى مِصْرَ، وَزُرْتُ أَقَارِبِي أُسْبُوعَيْنِ.</a:t>
@@ -14317,6 +14430,7 @@
                   <a:srgbClr val="1B3B6F"/>
                 </a:solidFill>
                 <a:latin typeface="Amiri" pitchFamily="2" charset="-78"/>
+                <a:ea typeface="Amiri" pitchFamily="2" charset="-78"/>
                 <a:cs typeface="Amiri" pitchFamily="2" charset="-78"/>
               </a:rPr>
               <a:t>مَاذَا فَعَلْتَ فِي العُطْلَةِ الأَخِيرَةِ؟</a:t>
@@ -14420,6 +14534,7 @@
                   <a:srgbClr val="1B3B6F"/>
                 </a:solidFill>
                 <a:latin typeface="Amiri" pitchFamily="2" charset="-78"/>
+                <a:ea typeface="Amiri" pitchFamily="2" charset="-78"/>
                 <a:cs typeface="Amiri" pitchFamily="2" charset="-78"/>
               </a:rPr>
               <a:t>أُفَضِّلُ أَنْ يَبْدَأَ فِي التَّاسِعَةِ، لِأَنَّ الطُّلَّابَ يَكُونُونَ أَكْثَرَ تَرْكِيزًا بَعْدَ النَّوْمِ الكَافِي.</a:t>
@@ -14496,6 +14611,7 @@
                   <a:srgbClr val="1B3B6F"/>
                 </a:solidFill>
                 <a:latin typeface="Amiri" pitchFamily="2" charset="-78"/>
+                <a:ea typeface="Amiri" pitchFamily="2" charset="-78"/>
                 <a:cs typeface="Amiri" pitchFamily="2" charset="-78"/>
               </a:rPr>
               <a:t>هَلْ تُفَضِّلُ أَنْ يَبْدَأَ اليَوْمُ مُبَكِّرًا أَمْ مُتَأَخِّرًا؟ لِمَاذَا؟</a:t>
@@ -14599,6 +14715,7 @@
                   <a:srgbClr val="1B3B6F"/>
                 </a:solidFill>
                 <a:latin typeface="Amiri" pitchFamily="2" charset="-78"/>
+                <a:ea typeface="Amiri" pitchFamily="2" charset="-78"/>
                 <a:cs typeface="Amiri" pitchFamily="2" charset="-78"/>
               </a:rPr>
               <a:t>أَهَمُّ تَارِيخٍ عِنْدِي هُوَ أَوَّلُ يَوْمٍ مِنَ العِيدِ، لِأَنَّ الأُسْرَةَ كُلَّهَا تَجْتَمِعُ.</a:t>
@@ -14675,6 +14792,7 @@
                   <a:srgbClr val="1B3B6F"/>
                 </a:solidFill>
                 <a:latin typeface="Amiri" pitchFamily="2" charset="-78"/>
+                <a:ea typeface="Amiri" pitchFamily="2" charset="-78"/>
                 <a:cs typeface="Amiri" pitchFamily="2" charset="-78"/>
               </a:rPr>
               <a:t>مَا أَهَمُّ تَارِيخٍ فِي سَنَتِكَ؟ وَلِمَاذَا؟</a:t>
@@ -14778,6 +14896,7 @@
                   <a:srgbClr val="1B3B6F"/>
                 </a:solidFill>
                 <a:latin typeface="Amiri" pitchFamily="2" charset="-78"/>
+                <a:ea typeface="Amiri" pitchFamily="2" charset="-78"/>
                 <a:cs typeface="Amiri" pitchFamily="2" charset="-78"/>
               </a:rPr>
               <a:t>سَأَكْتُبُ مَوَاعِيدَ الامْتِحَانَاتِ فِي تَقْوِيمِي، وَسَأُرَاجِعُ سَاعَةً كُلَّ يَوْمٍ.</a:t>
@@ -14854,6 +14973,7 @@
                   <a:srgbClr val="1B3B6F"/>
                 </a:solidFill>
                 <a:latin typeface="Amiri" pitchFamily="2" charset="-78"/>
+                <a:ea typeface="Amiri" pitchFamily="2" charset="-78"/>
                 <a:cs typeface="Amiri" pitchFamily="2" charset="-78"/>
               </a:rPr>
               <a:t>كَيْفَ سَتُنَظِّمُ وَقْتَكَ فِي الشَّهْرِ القَادِمِ؟</a:t>
@@ -15063,6 +15183,7 @@
                   <a:srgbClr val="D4AF37"/>
                 </a:solidFill>
                 <a:latin typeface="Amiri" pitchFamily="2" charset="-78"/>
+                <a:ea typeface="Amiri" pitchFamily="2" charset="-78"/>
                 <a:cs typeface="Amiri" pitchFamily="2" charset="-78"/>
               </a:rPr>
               <a:t>م</a:t>
@@ -15383,6 +15504,7 @@
                   <a:srgbClr val="8A6D1E"/>
                 </a:solidFill>
                 <a:latin typeface="Amiri" pitchFamily="2" charset="-78"/>
+                <a:ea typeface="Amiri" pitchFamily="2" charset="-78"/>
                 <a:cs typeface="Amiri" pitchFamily="2" charset="-78"/>
               </a:rPr>
               <a:t>التَّوَارِيخُ</a:t>
@@ -15663,6 +15785,7 @@
                   <a:srgbClr val="1B3B6F"/>
                 </a:solidFill>
                 <a:latin typeface="Amiri" pitchFamily="2" charset="-78"/>
+                <a:ea typeface="Amiri" pitchFamily="2" charset="-78"/>
                 <a:cs typeface="Amiri" pitchFamily="2" charset="-78"/>
               </a:rPr>
               <a:t>اليَوْمُ … مِنْ …</a:t>
@@ -15739,6 +15862,7 @@
                   <a:srgbClr val="1B3B6F"/>
                 </a:solidFill>
                 <a:latin typeface="Amiri" pitchFamily="2" charset="-78"/>
+                <a:ea typeface="Amiri" pitchFamily="2" charset="-78"/>
                 <a:cs typeface="Amiri" pitchFamily="2" charset="-78"/>
               </a:rPr>
               <a:t>مَا تَارِيخُ اليَوْمِ؟</a:t>
@@ -15907,6 +16031,7 @@
                   <a:srgbClr val="1B3B6F"/>
                 </a:solidFill>
                 <a:latin typeface="Amiri" pitchFamily="2" charset="-78"/>
+                <a:ea typeface="Amiri" pitchFamily="2" charset="-78"/>
                 <a:cs typeface="Amiri" pitchFamily="2" charset="-78"/>
               </a:rPr>
               <a:t>عِيدُ مِيلَادِي فِي …</a:t>
@@ -15983,6 +16108,7 @@
                   <a:srgbClr val="1B3B6F"/>
                 </a:solidFill>
                 <a:latin typeface="Amiri" pitchFamily="2" charset="-78"/>
+                <a:ea typeface="Amiri" pitchFamily="2" charset="-78"/>
                 <a:cs typeface="Amiri" pitchFamily="2" charset="-78"/>
               </a:rPr>
               <a:t>مَتَى عِيدُ مِيلَادِكَ؟</a:t>
@@ -16151,6 +16277,7 @@
                   <a:srgbClr val="1B3B6F"/>
                 </a:solidFill>
                 <a:latin typeface="Amiri" pitchFamily="2" charset="-78"/>
+                <a:ea typeface="Amiri" pitchFamily="2" charset="-78"/>
                 <a:cs typeface="Amiri" pitchFamily="2" charset="-78"/>
               </a:rPr>
               <a:t>أَدْرُسُ … أَيَّامٍ</a:t>
@@ -16227,6 +16354,7 @@
                   <a:srgbClr val="1B3B6F"/>
                 </a:solidFill>
                 <a:latin typeface="Amiri" pitchFamily="2" charset="-78"/>
+                <a:ea typeface="Amiri" pitchFamily="2" charset="-78"/>
                 <a:cs typeface="Amiri" pitchFamily="2" charset="-78"/>
               </a:rPr>
               <a:t>كَمْ يَوْمًا تَدْرُسُ فِي الأُسْبُوعِ؟</a:t>
@@ -16395,6 +16523,7 @@
                   <a:srgbClr val="1B3B6F"/>
                 </a:solidFill>
                 <a:latin typeface="Amiri" pitchFamily="2" charset="-78"/>
+                <a:ea typeface="Amiri" pitchFamily="2" charset="-78"/>
                 <a:cs typeface="Amiri" pitchFamily="2" charset="-78"/>
               </a:rPr>
               <a:t>تَبْدَأُ المَدْرَسَةُ فِي …</a:t>
@@ -16471,6 +16600,7 @@
                   <a:srgbClr val="1B3B6F"/>
                 </a:solidFill>
                 <a:latin typeface="Amiri" pitchFamily="2" charset="-78"/>
+                <a:ea typeface="Amiri" pitchFamily="2" charset="-78"/>
                 <a:cs typeface="Amiri" pitchFamily="2" charset="-78"/>
               </a:rPr>
               <a:t>مَتَى تَبْدَأُ المَدْرَسَةُ؟</a:t>
@@ -16639,6 +16769,7 @@
                   <a:srgbClr val="1B3B6F"/>
                 </a:solidFill>
                 <a:latin typeface="Amiri" pitchFamily="2" charset="-78"/>
+                <a:ea typeface="Amiri" pitchFamily="2" charset="-78"/>
                 <a:cs typeface="Amiri" pitchFamily="2" charset="-78"/>
               </a:rPr>
               <a:t>شَهْرِي المُفَضَّلُ …</a:t>
@@ -16715,6 +16846,7 @@
                   <a:srgbClr val="1B3B6F"/>
                 </a:solidFill>
                 <a:latin typeface="Amiri" pitchFamily="2" charset="-78"/>
+                <a:ea typeface="Amiri" pitchFamily="2" charset="-78"/>
                 <a:cs typeface="Amiri" pitchFamily="2" charset="-78"/>
               </a:rPr>
               <a:t>مَا شَهْرُكَ المُفَضَّلُ؟</a:t>
@@ -16869,6 +17001,7 @@
                   <a:srgbClr val="1B3B6F"/>
                 </a:solidFill>
                 <a:latin typeface="Amiri" pitchFamily="2" charset="-78"/>
+                <a:ea typeface="Amiri" pitchFamily="2" charset="-78"/>
                 <a:cs typeface="Amiri" pitchFamily="2" charset="-78"/>
               </a:rPr>
               <a:t>عَفْوًا، هَلْ يُمْكِنُ أَنْ تُعِيدَ السُّؤَالَ؟</a:t>
@@ -17002,6 +17135,7 @@
                   <a:srgbClr val="D4AF37"/>
                 </a:solidFill>
                 <a:latin typeface="Amiri" pitchFamily="2" charset="-78"/>
+                <a:ea typeface="Amiri" pitchFamily="2" charset="-78"/>
                 <a:cs typeface="Amiri" pitchFamily="2" charset="-78"/>
               </a:rPr>
               <a:t>م</a:t>
@@ -17322,6 +17456,7 @@
                   <a:srgbClr val="8A6D1E"/>
                 </a:solidFill>
                 <a:latin typeface="Amiri" pitchFamily="2" charset="-78"/>
+                <a:ea typeface="Amiri" pitchFamily="2" charset="-78"/>
                 <a:cs typeface="Amiri" pitchFamily="2" charset="-78"/>
               </a:rPr>
               <a:t>أُسْبُوعِي</a:t>
@@ -17602,6 +17737,7 @@
                   <a:srgbClr val="1B3B6F"/>
                 </a:solidFill>
                 <a:latin typeface="Amiri" pitchFamily="2" charset="-78"/>
+                <a:ea typeface="Amiri" pitchFamily="2" charset="-78"/>
                 <a:cs typeface="Amiri" pitchFamily="2" charset="-78"/>
               </a:rPr>
               <a:t>يَوْمُ الإِثْنَيْنِ … ثُمَّ …</a:t>
@@ -17678,6 +17814,7 @@
                   <a:srgbClr val="1B3B6F"/>
                 </a:solidFill>
                 <a:latin typeface="Amiri" pitchFamily="2" charset="-78"/>
+                <a:ea typeface="Amiri" pitchFamily="2" charset="-78"/>
                 <a:cs typeface="Amiri" pitchFamily="2" charset="-78"/>
               </a:rPr>
               <a:t>صِفْ يَوْمَ الإِثْنَيْنِ فِي مَدْرَسَتِكَ.</a:t>
@@ -17781,6 +17918,7 @@
                   <a:srgbClr val="1B3B6F"/>
                 </a:solidFill>
                 <a:latin typeface="Amiri" pitchFamily="2" charset="-78"/>
+                <a:ea typeface="Amiri" pitchFamily="2" charset="-78"/>
                 <a:cs typeface="Amiri" pitchFamily="2" charset="-78"/>
               </a:rPr>
               <a:t>أُحِبُّ يَوْمَ … لِأَنَّ …</a:t>
@@ -17857,6 +17995,7 @@
                   <a:srgbClr val="1B3B6F"/>
                 </a:solidFill>
                 <a:latin typeface="Amiri" pitchFamily="2" charset="-78"/>
+                <a:ea typeface="Amiri" pitchFamily="2" charset="-78"/>
                 <a:cs typeface="Amiri" pitchFamily="2" charset="-78"/>
               </a:rPr>
               <a:t>أَيَّ يَوْمٍ تُحِبُّ أَكْثَرَ؟ لِمَاذَا؟</a:t>
@@ -17960,6 +18099,7 @@
                   <a:srgbClr val="1B3B6F"/>
                 </a:solidFill>
                 <a:latin typeface="Amiri" pitchFamily="2" charset="-78"/>
+                <a:ea typeface="Amiri" pitchFamily="2" charset="-78"/>
                 <a:cs typeface="Amiri" pitchFamily="2" charset="-78"/>
               </a:rPr>
               <a:t>عَادَةً … يَوْمَ السَّبْتِ …</a:t>
@@ -18036,6 +18176,7 @@
                   <a:srgbClr val="1B3B6F"/>
                 </a:solidFill>
                 <a:latin typeface="Amiri" pitchFamily="2" charset="-78"/>
+                <a:ea typeface="Amiri" pitchFamily="2" charset="-78"/>
                 <a:cs typeface="Amiri" pitchFamily="2" charset="-78"/>
               </a:rPr>
               <a:t>مَاذَا تَفْعَلُ فِي نِهَايَةِ الأُسْبُوعِ عَادَةً؟</a:t>
@@ -18139,6 +18280,7 @@
                   <a:srgbClr val="1B3B6F"/>
                 </a:solidFill>
                 <a:latin typeface="Amiri" pitchFamily="2" charset="-78"/>
+                <a:ea typeface="Amiri" pitchFamily="2" charset="-78"/>
                 <a:cs typeface="Amiri" pitchFamily="2" charset="-78"/>
               </a:rPr>
               <a:t>تَبْدَأُ فِي … وَسَأَزُورُ …</a:t>
@@ -18215,6 +18357,7 @@
                   <a:srgbClr val="1B3B6F"/>
                 </a:solidFill>
                 <a:latin typeface="Amiri" pitchFamily="2" charset="-78"/>
+                <a:ea typeface="Amiri" pitchFamily="2" charset="-78"/>
                 <a:cs typeface="Amiri" pitchFamily="2" charset="-78"/>
               </a:rPr>
               <a:t>مَتَى تَبْدَأُ العُطْلَةُ القَادِمَةُ؟ وَمَاذَا سَتَفْعَلُ؟</a:t>
@@ -18318,6 +18461,7 @@
                   <a:srgbClr val="1B3B6F"/>
                 </a:solidFill>
                 <a:latin typeface="Amiri" pitchFamily="2" charset="-78"/>
+                <a:ea typeface="Amiri" pitchFamily="2" charset="-78"/>
                 <a:cs typeface="Amiri" pitchFamily="2" charset="-78"/>
               </a:rPr>
               <a:t>يَوْمَ السَّبْتِ المَاضِي …</a:t>
@@ -18394,6 +18538,7 @@
                   <a:srgbClr val="1B3B6F"/>
                 </a:solidFill>
                 <a:latin typeface="Amiri" pitchFamily="2" charset="-78"/>
+                <a:ea typeface="Amiri" pitchFamily="2" charset="-78"/>
                 <a:cs typeface="Amiri" pitchFamily="2" charset="-78"/>
               </a:rPr>
               <a:t>مَاذَا فَعَلْتَ يَوْمَ السَّبْتِ المَاضِي؟</a:t>
@@ -18603,6 +18748,7 @@
                   <a:srgbClr val="D4AF37"/>
                 </a:solidFill>
                 <a:latin typeface="Amiri" pitchFamily="2" charset="-78"/>
+                <a:ea typeface="Amiri" pitchFamily="2" charset="-78"/>
                 <a:cs typeface="Amiri" pitchFamily="2" charset="-78"/>
               </a:rPr>
               <a:t>م</a:t>
@@ -18923,6 +19069,7 @@
                   <a:srgbClr val="8A6D1E"/>
                 </a:solidFill>
                 <a:latin typeface="Amiri" pitchFamily="2" charset="-78"/>
+                <a:ea typeface="Amiri" pitchFamily="2" charset="-78"/>
                 <a:cs typeface="Amiri" pitchFamily="2" charset="-78"/>
               </a:rPr>
               <a:t>الوَقْتُ وَالتَّقْوِيمُ</a:t>
@@ -19203,6 +19350,7 @@
                   <a:srgbClr val="1B3B6F"/>
                 </a:solidFill>
                 <a:latin typeface="Amiri" pitchFamily="2" charset="-78"/>
+                <a:ea typeface="Amiri" pitchFamily="2" charset="-78"/>
                 <a:cs typeface="Amiri" pitchFamily="2" charset="-78"/>
               </a:rPr>
               <a:t>بَيْنَمَا نَدْرُسُ … يَدْرُسُ …</a:t>
@@ -19279,6 +19427,7 @@
                   <a:srgbClr val="1B3B6F"/>
                 </a:solidFill>
                 <a:latin typeface="Amiri" pitchFamily="2" charset="-78"/>
+                <a:ea typeface="Amiri" pitchFamily="2" charset="-78"/>
                 <a:cs typeface="Amiri" pitchFamily="2" charset="-78"/>
               </a:rPr>
               <a:t>قَارِنْ بَيْنَ أُسْبُوعِكَ الدِّرَاسِيِّ وَأُسْبُوعِ طَالِبٍ فِي بَلَدٍ عَرَبِيٍّ.</a:t>
@@ -19382,6 +19531,7 @@
                   <a:srgbClr val="1B3B6F"/>
                 </a:solidFill>
                 <a:latin typeface="Amiri" pitchFamily="2" charset="-78"/>
+                <a:ea typeface="Amiri" pitchFamily="2" charset="-78"/>
                 <a:cs typeface="Amiri" pitchFamily="2" charset="-78"/>
               </a:rPr>
               <a:t>أَعْتَقِدُ أَنَّهَا … لٰكِنَّ …</a:t>
@@ -19458,6 +19608,7 @@
                   <a:srgbClr val="1B3B6F"/>
                 </a:solidFill>
                 <a:latin typeface="Amiri" pitchFamily="2" charset="-78"/>
+                <a:ea typeface="Amiri" pitchFamily="2" charset="-78"/>
                 <a:cs typeface="Amiri" pitchFamily="2" charset="-78"/>
               </a:rPr>
               <a:t>هَلْ العُطْلَةُ الصَّيْفِيَّةُ طَوِيلَةٌ بِمَا يَكْفِي فِي رَأْيِكَ؟</a:t>
@@ -19561,6 +19712,7 @@
                   <a:srgbClr val="1B3B6F"/>
                 </a:solidFill>
                 <a:latin typeface="Amiri" pitchFamily="2" charset="-78"/>
+                <a:ea typeface="Amiri" pitchFamily="2" charset="-78"/>
                 <a:cs typeface="Amiri" pitchFamily="2" charset="-78"/>
               </a:rPr>
               <a:t>أَكْتُبُ كُلَّ مَوْعِدٍ فِي …</a:t>
@@ -19637,6 +19789,7 @@
                   <a:srgbClr val="1B3B6F"/>
                 </a:solidFill>
                 <a:latin typeface="Amiri" pitchFamily="2" charset="-78"/>
+                <a:ea typeface="Amiri" pitchFamily="2" charset="-78"/>
                 <a:cs typeface="Amiri" pitchFamily="2" charset="-78"/>
               </a:rPr>
               <a:t>كَيْفَ تُنَظِّمُ مَوَاعِيدَكَ وَوَاجِبَاتِكَ؟</a:t>
@@ -19740,6 +19893,7 @@
                   <a:srgbClr val="1B3B6F"/>
                 </a:solidFill>
                 <a:latin typeface="Amiri" pitchFamily="2" charset="-78"/>
+                <a:ea typeface="Amiri" pitchFamily="2" charset="-78"/>
                 <a:cs typeface="Amiri" pitchFamily="2" charset="-78"/>
               </a:rPr>
               <a:t>فِي المَدْرَسَةِ الابْتِدَائِيَّةِ كَانَ …</a:t>
@@ -19816,6 +19970,7 @@
                   <a:srgbClr val="1B3B6F"/>
                 </a:solidFill>
                 <a:latin typeface="Amiri" pitchFamily="2" charset="-78"/>
+                <a:ea typeface="Amiri" pitchFamily="2" charset="-78"/>
                 <a:cs typeface="Amiri" pitchFamily="2" charset="-78"/>
               </a:rPr>
               <a:t>كَيْفَ كَانَ أُسْبُوعُكَ فِي المَدْرَسَةِ الابْتِدَائِيَّةِ؟</a:t>
@@ -19919,6 +20074,7 @@
                   <a:srgbClr val="1B3B6F"/>
                 </a:solidFill>
                 <a:latin typeface="Amiri" pitchFamily="2" charset="-78"/>
+                <a:ea typeface="Amiri" pitchFamily="2" charset="-78"/>
                 <a:cs typeface="Amiri" pitchFamily="2" charset="-78"/>
               </a:rPr>
               <a:t>لَوْ كَانَ عِنْدِي … لَتَعَلَّمْتُ …</a:t>
@@ -19995,6 +20151,7 @@
                   <a:srgbClr val="1B3B6F"/>
                 </a:solidFill>
                 <a:latin typeface="Amiri" pitchFamily="2" charset="-78"/>
+                <a:ea typeface="Amiri" pitchFamily="2" charset="-78"/>
                 <a:cs typeface="Amiri" pitchFamily="2" charset="-78"/>
               </a:rPr>
               <a:t>لَوْ كَانَ عِنْدَكَ يَوْمٌ إِضَافِيٌّ فِي الأُسْبُوعِ، مَاذَا تَفْعَلُ؟</a:t>
@@ -20204,6 +20361,7 @@
                   <a:srgbClr val="D4AF37"/>
                 </a:solidFill>
                 <a:latin typeface="Amiri" pitchFamily="2" charset="-78"/>
+                <a:ea typeface="Amiri" pitchFamily="2" charset="-78"/>
                 <a:cs typeface="Amiri" pitchFamily="2" charset="-78"/>
               </a:rPr>
               <a:t>م</a:t>
@@ -20524,6 +20682,7 @@
                   <a:srgbClr val="8A6D1E"/>
                 </a:solidFill>
                 <a:latin typeface="Amiri" pitchFamily="2" charset="-78"/>
+                <a:ea typeface="Amiri" pitchFamily="2" charset="-78"/>
                 <a:cs typeface="Amiri" pitchFamily="2" charset="-78"/>
               </a:rPr>
               <a:t>آدَابُ الصَّفِّ</a:t>
@@ -22055,6 +22214,7 @@
                   <a:srgbClr val="D4AF37"/>
                 </a:solidFill>
                 <a:latin typeface="Amiri" pitchFamily="2" charset="-78"/>
+                <a:ea typeface="Amiri" pitchFamily="2" charset="-78"/>
                 <a:cs typeface="Amiri" pitchFamily="2" charset="-78"/>
               </a:rPr>
               <a:t>م</a:t>
@@ -22375,6 +22535,7 @@
                   <a:srgbClr val="8A6D1E"/>
                 </a:solidFill>
                 <a:latin typeface="Amiri" pitchFamily="2" charset="-78"/>
+                <a:ea typeface="Amiri" pitchFamily="2" charset="-78"/>
                 <a:cs typeface="Amiri" pitchFamily="2" charset="-78"/>
               </a:rPr>
               <a:t>نَمُوذَجُ الإِجَابَةِ</a:t>
@@ -22617,6 +22778,7 @@
                   <a:srgbClr val="1B3B6F"/>
                 </a:solidFill>
                 <a:latin typeface="Amiri" pitchFamily="2" charset="-78"/>
+                <a:ea typeface="Amiri" pitchFamily="2" charset="-78"/>
                 <a:cs typeface="Amiri" pitchFamily="2" charset="-78"/>
               </a:rPr>
               <a:t>اليَوْمُ هُوَ الخَامِسُ مِنْ أُكْتُوبَرَ.</a:t>
@@ -22693,6 +22855,7 @@
                   <a:srgbClr val="1B3B6F"/>
                 </a:solidFill>
                 <a:latin typeface="Amiri" pitchFamily="2" charset="-78"/>
+                <a:ea typeface="Amiri" pitchFamily="2" charset="-78"/>
                 <a:cs typeface="Amiri" pitchFamily="2" charset="-78"/>
               </a:rPr>
               <a:t>مَا تَارِيخُ اليَوْمِ؟</a:t>
@@ -22796,6 +22959,7 @@
                   <a:srgbClr val="1B3B6F"/>
                 </a:solidFill>
                 <a:latin typeface="Amiri" pitchFamily="2" charset="-78"/>
+                <a:ea typeface="Amiri" pitchFamily="2" charset="-78"/>
                 <a:cs typeface="Amiri" pitchFamily="2" charset="-78"/>
               </a:rPr>
               <a:t>عِيدُ مِيلَادِي فِي الثَّالِثِ مِنْ مَارِسَ.</a:t>
@@ -22872,6 +23036,7 @@
                   <a:srgbClr val="1B3B6F"/>
                 </a:solidFill>
                 <a:latin typeface="Amiri" pitchFamily="2" charset="-78"/>
+                <a:ea typeface="Amiri" pitchFamily="2" charset="-78"/>
                 <a:cs typeface="Amiri" pitchFamily="2" charset="-78"/>
               </a:rPr>
               <a:t>مَتَى عِيدُ مِيلَادِكَ؟</a:t>
@@ -22975,6 +23140,7 @@
                   <a:srgbClr val="1B3B6F"/>
                 </a:solidFill>
                 <a:latin typeface="Amiri" pitchFamily="2" charset="-78"/>
+                <a:ea typeface="Amiri" pitchFamily="2" charset="-78"/>
                 <a:cs typeface="Amiri" pitchFamily="2" charset="-78"/>
               </a:rPr>
               <a:t>أَدْرُسُ خَمْسَةَ أَيَّامٍ فِي الأُسْبُوعِ.</a:t>
@@ -23051,6 +23217,7 @@
                   <a:srgbClr val="1B3B6F"/>
                 </a:solidFill>
                 <a:latin typeface="Amiri" pitchFamily="2" charset="-78"/>
+                <a:ea typeface="Amiri" pitchFamily="2" charset="-78"/>
                 <a:cs typeface="Amiri" pitchFamily="2" charset="-78"/>
               </a:rPr>
               <a:t>كَمْ يَوْمًا تَدْرُسُ فِي الأُسْبُوعِ؟</a:t>
@@ -23154,6 +23321,7 @@
                   <a:srgbClr val="1B3B6F"/>
                 </a:solidFill>
                 <a:latin typeface="Amiri" pitchFamily="2" charset="-78"/>
+                <a:ea typeface="Amiri" pitchFamily="2" charset="-78"/>
                 <a:cs typeface="Amiri" pitchFamily="2" charset="-78"/>
               </a:rPr>
               <a:t>تَبْدَأُ المَدْرَسَةُ فِي السَّاعَةِ الثَّامِنَةِ وَالنِّصْفِ.</a:t>
@@ -23230,6 +23398,7 @@
                   <a:srgbClr val="1B3B6F"/>
                 </a:solidFill>
                 <a:latin typeface="Amiri" pitchFamily="2" charset="-78"/>
+                <a:ea typeface="Amiri" pitchFamily="2" charset="-78"/>
                 <a:cs typeface="Amiri" pitchFamily="2" charset="-78"/>
               </a:rPr>
               <a:t>مَتَى تَبْدَأُ المَدْرَسَةُ؟</a:t>
@@ -23333,6 +23502,7 @@
                   <a:srgbClr val="1B3B6F"/>
                 </a:solidFill>
                 <a:latin typeface="Amiri" pitchFamily="2" charset="-78"/>
+                <a:ea typeface="Amiri" pitchFamily="2" charset="-78"/>
                 <a:cs typeface="Amiri" pitchFamily="2" charset="-78"/>
               </a:rPr>
               <a:t>شَهْرِي المُفَضَّلُ هُوَ أُغُسْطُسُ، لِأَنَّهُ فِي العُطْلَةِ.</a:t>
@@ -23409,6 +23579,7 @@
                   <a:srgbClr val="1B3B6F"/>
                 </a:solidFill>
                 <a:latin typeface="Amiri" pitchFamily="2" charset="-78"/>
+                <a:ea typeface="Amiri" pitchFamily="2" charset="-78"/>
                 <a:cs typeface="Amiri" pitchFamily="2" charset="-78"/>
               </a:rPr>
               <a:t>مَا شَهْرُكَ المُفَضَّلُ؟</a:t>
@@ -23618,6 +23789,7 @@
                   <a:srgbClr val="D4AF37"/>
                 </a:solidFill>
                 <a:latin typeface="Amiri" pitchFamily="2" charset="-78"/>
+                <a:ea typeface="Amiri" pitchFamily="2" charset="-78"/>
                 <a:cs typeface="Amiri" pitchFamily="2" charset="-78"/>
               </a:rPr>
               <a:t>م</a:t>
@@ -23938,6 +24110,7 @@
                   <a:srgbClr val="8A6D1E"/>
                 </a:solidFill>
                 <a:latin typeface="Amiri" pitchFamily="2" charset="-78"/>
+                <a:ea typeface="Amiri" pitchFamily="2" charset="-78"/>
                 <a:cs typeface="Amiri" pitchFamily="2" charset="-78"/>
               </a:rPr>
               <a:t>نَمُوذَجُ الإِجَابَةِ</a:t>
@@ -24180,6 +24353,7 @@
                   <a:srgbClr val="1B3B6F"/>
                 </a:solidFill>
                 <a:latin typeface="Amiri" pitchFamily="2" charset="-78"/>
+                <a:ea typeface="Amiri" pitchFamily="2" charset="-78"/>
                 <a:cs typeface="Amiri" pitchFamily="2" charset="-78"/>
               </a:rPr>
               <a:t>يَوْمُ الإِثْنَيْنِ طَوِيلٌ؛ تَبْدَأُ الحِصَّةُ الأُولَى فِي الثَّامِنَةِ، ثُمَّ عِنْدِي الرِّيَاضِيَّاتُ وَالعُلُومُ، وَأَرْجِعُ إِلَى البَيْتِ فِي الرَّابِعَةِ.</a:t>
@@ -24256,6 +24430,7 @@
                   <a:srgbClr val="1B3B6F"/>
                 </a:solidFill>
                 <a:latin typeface="Amiri" pitchFamily="2" charset="-78"/>
+                <a:ea typeface="Amiri" pitchFamily="2" charset="-78"/>
                 <a:cs typeface="Amiri" pitchFamily="2" charset="-78"/>
               </a:rPr>
               <a:t>صِفْ يَوْمَ الإِثْنَيْنِ فِي مَدْرَسَتِكَ.</a:t>
@@ -24359,6 +24534,7 @@
                   <a:srgbClr val="1B3B6F"/>
                 </a:solidFill>
                 <a:latin typeface="Amiri" pitchFamily="2" charset="-78"/>
+                <a:ea typeface="Amiri" pitchFamily="2" charset="-78"/>
                 <a:cs typeface="Amiri" pitchFamily="2" charset="-78"/>
               </a:rPr>
               <a:t>أُحِبُّ يَوْمَ الأَرْبِعَاءِ أَكْثَرَ، لِأَنَّ عِنْدِي حِصَّةَ الفَنِّ وَحِصَّةَ الرِّيَاضَةِ.</a:t>
@@ -24435,6 +24611,7 @@
                   <a:srgbClr val="1B3B6F"/>
                 </a:solidFill>
                 <a:latin typeface="Amiri" pitchFamily="2" charset="-78"/>
+                <a:ea typeface="Amiri" pitchFamily="2" charset="-78"/>
                 <a:cs typeface="Amiri" pitchFamily="2" charset="-78"/>
               </a:rPr>
               <a:t>أَيَّ يَوْمٍ تُحِبُّ أَكْثَرَ؟ لِمَاذَا؟</a:t>
@@ -24538,6 +24715,7 @@
                   <a:srgbClr val="1B3B6F"/>
                 </a:solidFill>
                 <a:latin typeface="Amiri" pitchFamily="2" charset="-78"/>
+                <a:ea typeface="Amiri" pitchFamily="2" charset="-78"/>
                 <a:cs typeface="Amiri" pitchFamily="2" charset="-78"/>
               </a:rPr>
               <a:t>عَادَةً أَزُورُ جَدَّتِي يَوْمَ السَّبْتِ، وَأُرَاجِعُ دُرُوسِي يَوْمَ الأَحَدِ.</a:t>
@@ -24614,6 +24792,7 @@
                   <a:srgbClr val="1B3B6F"/>
                 </a:solidFill>
                 <a:latin typeface="Amiri" pitchFamily="2" charset="-78"/>
+                <a:ea typeface="Amiri" pitchFamily="2" charset="-78"/>
                 <a:cs typeface="Amiri" pitchFamily="2" charset="-78"/>
               </a:rPr>
               <a:t>مَاذَا تَفْعَلُ فِي نِهَايَةِ الأُسْبُوعِ عَادَةً؟</a:t>
@@ -24717,6 +24896,7 @@
                   <a:srgbClr val="1B3B6F"/>
                 </a:solidFill>
                 <a:latin typeface="Amiri" pitchFamily="2" charset="-78"/>
+                <a:ea typeface="Amiri" pitchFamily="2" charset="-78"/>
                 <a:cs typeface="Amiri" pitchFamily="2" charset="-78"/>
               </a:rPr>
               <a:t>تَبْدَأُ فِي العِشْرِينَ مِنْ دِيسَمْبَرَ، وَسَأَزُورُ أَقَارِبِي فِي مَانْشِسْتَرَ.</a:t>
@@ -24793,6 +24973,7 @@
                   <a:srgbClr val="1B3B6F"/>
                 </a:solidFill>
                 <a:latin typeface="Amiri" pitchFamily="2" charset="-78"/>
+                <a:ea typeface="Amiri" pitchFamily="2" charset="-78"/>
                 <a:cs typeface="Amiri" pitchFamily="2" charset="-78"/>
               </a:rPr>
               <a:t>مَتَى تَبْدَأُ العُطْلَةُ القَادِمَةُ؟ وَمَاذَا سَتَفْعَلُ؟</a:t>
@@ -24896,6 +25077,7 @@
                   <a:srgbClr val="1B3B6F"/>
                 </a:solidFill>
                 <a:latin typeface="Amiri" pitchFamily="2" charset="-78"/>
+                <a:ea typeface="Amiri" pitchFamily="2" charset="-78"/>
                 <a:cs typeface="Amiri" pitchFamily="2" charset="-78"/>
               </a:rPr>
               <a:t>يَوْمَ السَّبْتِ المَاضِي ذَهَبْتُ إِلَى المَكْتَبَةِ فِي العَاشِرَةِ، ثُمَّ لَعِبْتُ كُرَةَ القَدَمِ.</a:t>
@@ -24972,6 +25154,7 @@
                   <a:srgbClr val="1B3B6F"/>
                 </a:solidFill>
                 <a:latin typeface="Amiri" pitchFamily="2" charset="-78"/>
+                <a:ea typeface="Amiri" pitchFamily="2" charset="-78"/>
                 <a:cs typeface="Amiri" pitchFamily="2" charset="-78"/>
               </a:rPr>
               <a:t>مَاذَا فَعَلْتَ يَوْمَ السَّبْتِ المَاضِي؟</a:t>
@@ -25181,6 +25364,7 @@
                   <a:srgbClr val="D4AF37"/>
                 </a:solidFill>
                 <a:latin typeface="Amiri" pitchFamily="2" charset="-78"/>
+                <a:ea typeface="Amiri" pitchFamily="2" charset="-78"/>
                 <a:cs typeface="Amiri" pitchFamily="2" charset="-78"/>
               </a:rPr>
               <a:t>م</a:t>
@@ -25501,6 +25685,7 @@
                   <a:srgbClr val="8A6D1E"/>
                 </a:solidFill>
                 <a:latin typeface="Amiri" pitchFamily="2" charset="-78"/>
+                <a:ea typeface="Amiri" pitchFamily="2" charset="-78"/>
                 <a:cs typeface="Amiri" pitchFamily="2" charset="-78"/>
               </a:rPr>
               <a:t>نَمُوذَجُ الإِجَابَةِ</a:t>
@@ -25743,6 +25928,7 @@
                   <a:srgbClr val="1B3B6F"/>
                 </a:solidFill>
                 <a:latin typeface="Amiri" pitchFamily="2" charset="-78"/>
+                <a:ea typeface="Amiri" pitchFamily="2" charset="-78"/>
                 <a:cs typeface="Amiri" pitchFamily="2" charset="-78"/>
               </a:rPr>
               <a:t>بَيْنَمَا نَدْرُسُ مِنَ الإِثْنَيْنِ إِلَى الجُمُعَةِ، يَدْرُسُ الطُّلَّابُ فِي بَعْضِ البُلْدَانِ العَرَبِيَّةِ مِنَ الأَحَدِ إِلَى الخَمِيسِ، لِأَنَّ الجُمُعَةَ عُطْلَةٌ هُنَاكَ.</a:t>
@@ -25822,6 +26008,7 @@
                   <a:srgbClr val="1B3B6F"/>
                 </a:solidFill>
                 <a:latin typeface="Amiri" pitchFamily="2" charset="-78"/>
+                <a:ea typeface="Amiri" pitchFamily="2" charset="-78"/>
                 <a:cs typeface="Amiri" pitchFamily="2" charset="-78"/>
               </a:rPr>
               <a:t>قَارِنْ بَيْنَ أُسْبُوعِكَ الدِّرَاسِيِّ وَأُسْبُوعِ طَالِبٍ فِي بَلَدٍ عَرَبِيٍّ.</a:t>
@@ -25925,6 +26112,7 @@
                   <a:srgbClr val="1B3B6F"/>
                 </a:solidFill>
                 <a:latin typeface="Amiri" pitchFamily="2" charset="-78"/>
+                <a:ea typeface="Amiri" pitchFamily="2" charset="-78"/>
                 <a:cs typeface="Amiri" pitchFamily="2" charset="-78"/>
               </a:rPr>
               <a:t>أَعْتَقِدُ أَنَّهَا مُنَاسِبَةٌ، لِأَنَّهَا سِتَّةُ أَسَابِيعَ، لٰكِنَّ بَعْضَ الطُّلَّابِ يَنْسَوْنَ دُرُوسَهُمْ فِيهَا.</a:t>
@@ -26004,6 +26192,7 @@
                   <a:srgbClr val="1B3B6F"/>
                 </a:solidFill>
                 <a:latin typeface="Amiri" pitchFamily="2" charset="-78"/>
+                <a:ea typeface="Amiri" pitchFamily="2" charset="-78"/>
                 <a:cs typeface="Amiri" pitchFamily="2" charset="-78"/>
               </a:rPr>
               <a:t>هَلْ العُطْلَةُ الصَّيْفِيَّةُ طَوِيلَةٌ بِمَا يَكْفِي فِي رَأْيِكَ؟</a:t>
@@ -26107,6 +26296,7 @@
                   <a:srgbClr val="1B3B6F"/>
                 </a:solidFill>
                 <a:latin typeface="Amiri" pitchFamily="2" charset="-78"/>
+                <a:ea typeface="Amiri" pitchFamily="2" charset="-78"/>
                 <a:cs typeface="Amiri" pitchFamily="2" charset="-78"/>
               </a:rPr>
               <a:t>أَكْتُبُ كُلَّ مَوْعِدٍ فِي تَقْوِيمٍ عَلَى هَاتِفِي، وَأُنْهِي الوَاجِبَ فِي اليَوْمِ نَفْسِهِ.</a:t>
@@ -26183,6 +26373,7 @@
                   <a:srgbClr val="1B3B6F"/>
                 </a:solidFill>
                 <a:latin typeface="Amiri" pitchFamily="2" charset="-78"/>
+                <a:ea typeface="Amiri" pitchFamily="2" charset="-78"/>
                 <a:cs typeface="Amiri" pitchFamily="2" charset="-78"/>
               </a:rPr>
               <a:t>كَيْفَ تُنَظِّمُ مَوَاعِيدَكَ وَوَاجِبَاتِكَ؟</a:t>
@@ -26392,6 +26583,7 @@
                   <a:srgbClr val="D4AF37"/>
                 </a:solidFill>
                 <a:latin typeface="Amiri" pitchFamily="2" charset="-78"/>
+                <a:ea typeface="Amiri" pitchFamily="2" charset="-78"/>
                 <a:cs typeface="Amiri" pitchFamily="2" charset="-78"/>
               </a:rPr>
               <a:t>م</a:t>
@@ -26712,6 +26904,7 @@
                   <a:srgbClr val="8A6D1E"/>
                 </a:solidFill>
                 <a:latin typeface="Amiri" pitchFamily="2" charset="-78"/>
+                <a:ea typeface="Amiri" pitchFamily="2" charset="-78"/>
                 <a:cs typeface="Amiri" pitchFamily="2" charset="-78"/>
               </a:rPr>
               <a:t>نَمُوذَجُ الإِجَابَةِ</a:t>
@@ -26954,6 +27147,7 @@
                   <a:srgbClr val="1B3B6F"/>
                 </a:solidFill>
                 <a:latin typeface="Amiri" pitchFamily="2" charset="-78"/>
+                <a:ea typeface="Amiri" pitchFamily="2" charset="-78"/>
                 <a:cs typeface="Amiri" pitchFamily="2" charset="-78"/>
               </a:rPr>
               <a:t>فِي المَدْرَسَةِ الابْتِدَائِيَّةِ كَانَ اليَوْمُ أَقْصَرَ، وَكُنْتُ أَلْعَبُ أَكْثَرَ وَأَدْرُسُ أَقَلَّ.</a:t>
@@ -27030,6 +27224,7 @@
                   <a:srgbClr val="1B3B6F"/>
                 </a:solidFill>
                 <a:latin typeface="Amiri" pitchFamily="2" charset="-78"/>
+                <a:ea typeface="Amiri" pitchFamily="2" charset="-78"/>
                 <a:cs typeface="Amiri" pitchFamily="2" charset="-78"/>
               </a:rPr>
               <a:t>كَيْفَ كَانَ أُسْبُوعُكَ فِي المَدْرَسَةِ الابْتِدَائِيَّةِ؟</a:t>
@@ -27133,6 +27328,7 @@
                   <a:srgbClr val="1B3B6F"/>
                 </a:solidFill>
                 <a:latin typeface="Amiri" pitchFamily="2" charset="-78"/>
+                <a:ea typeface="Amiri" pitchFamily="2" charset="-78"/>
                 <a:cs typeface="Amiri" pitchFamily="2" charset="-78"/>
               </a:rPr>
               <a:t>لَوْ كَانَ عِنْدِي يَوْمٌ إِضَافِيٌّ، لَتَعَلَّمْتُ لُغَةً جَدِيدَةً، وَلَزُرْتُ أَصْدِقَائِي.</a:t>
@@ -27212,6 +27408,7 @@
                   <a:srgbClr val="1B3B6F"/>
                 </a:solidFill>
                 <a:latin typeface="Amiri" pitchFamily="2" charset="-78"/>
+                <a:ea typeface="Amiri" pitchFamily="2" charset="-78"/>
                 <a:cs typeface="Amiri" pitchFamily="2" charset="-78"/>
               </a:rPr>
               <a:t>لَوْ كَانَ عِنْدَكَ يَوْمٌ إِضَافِيٌّ فِي الأُسْبُوعِ، مَاذَا تَفْعَلُ؟</a:t>
@@ -27421,6 +27618,7 @@
                   <a:srgbClr val="D4AF37"/>
                 </a:solidFill>
                 <a:latin typeface="Amiri" pitchFamily="2" charset="-78"/>
+                <a:ea typeface="Amiri" pitchFamily="2" charset="-78"/>
                 <a:cs typeface="Amiri" pitchFamily="2" charset="-78"/>
               </a:rPr>
               <a:t>م</a:t>
@@ -27741,6 +27939,7 @@
                   <a:srgbClr val="8A6D1E"/>
                 </a:solidFill>
                 <a:latin typeface="Amiri" pitchFamily="2" charset="-78"/>
+                <a:ea typeface="Amiri" pitchFamily="2" charset="-78"/>
                 <a:cs typeface="Amiri" pitchFamily="2" charset="-78"/>
               </a:rPr>
               <a:t>قَيِّمْ عَمَلَكَ</a:t>
@@ -28985,6 +29184,7 @@
                   <a:srgbClr val="FFFFFF"/>
                 </a:solidFill>
                 <a:latin typeface="Amiri" pitchFamily="2" charset="-78"/>
+                <a:ea typeface="Amiri" pitchFamily="2" charset="-78"/>
                 <a:cs typeface="Amiri" pitchFamily="2" charset="-78"/>
               </a:rPr>
               <a:t>أَحْسَنْتُمْ! إِلَى اللِّقَاءِ</a:t>
@@ -29137,6 +29337,7 @@
                   <a:srgbClr val="D4AF37"/>
                 </a:solidFill>
                 <a:latin typeface="Amiri" pitchFamily="2" charset="-78"/>
+                <a:ea typeface="Amiri" pitchFamily="2" charset="-78"/>
                 <a:cs typeface="Amiri" pitchFamily="2" charset="-78"/>
               </a:rPr>
               <a:t>وَرْشَةُ الكِتَابَةِ</a:t>
@@ -29270,6 +29471,7 @@
                   <a:srgbClr val="D4AF37"/>
                 </a:solidFill>
                 <a:latin typeface="Amiri" pitchFamily="2" charset="-78"/>
+                <a:ea typeface="Amiri" pitchFamily="2" charset="-78"/>
                 <a:cs typeface="Amiri" pitchFamily="2" charset="-78"/>
               </a:rPr>
               <a:t>م</a:t>
@@ -29590,6 +29792,7 @@
                   <a:srgbClr val="8A6D1E"/>
                 </a:solidFill>
                 <a:latin typeface="Amiri" pitchFamily="2" charset="-78"/>
+                <a:ea typeface="Amiri" pitchFamily="2" charset="-78"/>
                 <a:cs typeface="Amiri" pitchFamily="2" charset="-78"/>
               </a:rPr>
               <a:t>خَرِيطَةُ الوَرْشَةِ</a:t>
@@ -29904,6 +30107,7 @@
                   <a:srgbClr val="1B3B6F"/>
                 </a:solidFill>
                 <a:latin typeface="Amiri" pitchFamily="2" charset="-78"/>
+                <a:ea typeface="Amiri" pitchFamily="2" charset="-78"/>
                 <a:cs typeface="Amiri" pitchFamily="2" charset="-78"/>
               </a:rPr>
               <a:t>كَيْفَ</a:t>
@@ -30180,6 +30384,7 @@
                   <a:srgbClr val="1E6B52"/>
                 </a:solidFill>
                 <a:latin typeface="Amiri" pitchFamily="2" charset="-78"/>
+                <a:ea typeface="Amiri" pitchFamily="2" charset="-78"/>
                 <a:cs typeface="Amiri" pitchFamily="2" charset="-78"/>
               </a:rPr>
               <a:t>تَمْثِيلُ الدَّوْرِ</a:t>
@@ -30456,6 +30661,7 @@
                   <a:srgbClr val="8A6D1E"/>
                 </a:solidFill>
                 <a:latin typeface="Amiri" pitchFamily="2" charset="-78"/>
+                <a:ea typeface="Amiri" pitchFamily="2" charset="-78"/>
                 <a:cs typeface="Amiri" pitchFamily="2" charset="-78"/>
               </a:rPr>
               <a:t>النَّمُوذَجُ</a:t>
@@ -30732,6 +30938,7 @@
                   <a:srgbClr val="1E6B52"/>
                 </a:solidFill>
                 <a:latin typeface="Amiri" pitchFamily="2" charset="-78"/>
+                <a:ea typeface="Amiri" pitchFamily="2" charset="-78"/>
                 <a:cs typeface="Amiri" pitchFamily="2" charset="-78"/>
               </a:rPr>
               <a:t>المُحَادَثَةُ</a:t>
@@ -31008,6 +31215,7 @@
                   <a:srgbClr val="8A6D1E"/>
                 </a:solidFill>
                 <a:latin typeface="Amiri" pitchFamily="2" charset="-78"/>
+                <a:ea typeface="Amiri" pitchFamily="2" charset="-78"/>
                 <a:cs typeface="Amiri" pitchFamily="2" charset="-78"/>
               </a:rPr>
               <a:t>قَيِّمْ</a:t>
@@ -31251,6 +31459,7 @@
                   <a:srgbClr val="D4AF37"/>
                 </a:solidFill>
                 <a:latin typeface="Amiri" pitchFamily="2" charset="-78"/>
+                <a:ea typeface="Amiri" pitchFamily="2" charset="-78"/>
                 <a:cs typeface="Amiri" pitchFamily="2" charset="-78"/>
               </a:rPr>
               <a:t>م</a:t>
@@ -31571,6 +31780,7 @@
                   <a:srgbClr val="8A6D1E"/>
                 </a:solidFill>
                 <a:latin typeface="Amiri" pitchFamily="2" charset="-78"/>
+                <a:ea typeface="Amiri" pitchFamily="2" charset="-78"/>
                 <a:cs typeface="Amiri" pitchFamily="2" charset="-78"/>
               </a:rPr>
               <a:t>امْتِحَانُ التَّحَدُّثِ</a:t>
@@ -32195,6 +32405,7 @@
                   <a:srgbClr val="1B3B6F"/>
                 </a:solidFill>
                 <a:latin typeface="Amiri" pitchFamily="2" charset="-78"/>
+                <a:ea typeface="Amiri" pitchFamily="2" charset="-78"/>
                 <a:cs typeface="Amiri" pitchFamily="2" charset="-78"/>
               </a:rPr>
               <a:t>عَفْوًا، هَلْ يُمْكِنُ أَنْ تُعِيدَ السُّؤَالَ؟</a:t>
@@ -32294,6 +32505,7 @@
                   <a:srgbClr val="1B3B6F"/>
                 </a:solidFill>
                 <a:latin typeface="Amiri" pitchFamily="2" charset="-78"/>
+                <a:ea typeface="Amiri" pitchFamily="2" charset="-78"/>
                 <a:cs typeface="Amiri" pitchFamily="2" charset="-78"/>
               </a:rPr>
               <a:t>لَحْظَةً، دَعْنِي أُفَكِّرُ …</a:t>
@@ -32393,6 +32605,7 @@
                   <a:srgbClr val="1B3B6F"/>
                 </a:solidFill>
                 <a:latin typeface="Amiri" pitchFamily="2" charset="-78"/>
+                <a:ea typeface="Amiri" pitchFamily="2" charset="-78"/>
                 <a:cs typeface="Amiri" pitchFamily="2" charset="-78"/>
               </a:rPr>
               <a:t>أَقْصِدُ …</a:t>
@@ -32564,6 +32777,7 @@
                   <a:srgbClr val="D4AF37"/>
                 </a:solidFill>
                 <a:latin typeface="Amiri" pitchFamily="2" charset="-78"/>
+                <a:ea typeface="Amiri" pitchFamily="2" charset="-78"/>
                 <a:cs typeface="Amiri" pitchFamily="2" charset="-78"/>
               </a:rPr>
               <a:t>م</a:t>
@@ -32884,6 +33098,7 @@
                   <a:srgbClr val="8A6D1E"/>
                 </a:solidFill>
                 <a:latin typeface="Amiri" pitchFamily="2" charset="-78"/>
+                <a:ea typeface="Amiri" pitchFamily="2" charset="-78"/>
                 <a:cs typeface="Amiri" pitchFamily="2" charset="-78"/>
               </a:rPr>
               <a:t>كَلِمَاتُ الوَقْتِ</a:t>
@@ -33187,6 +33402,7 @@
                   <a:srgbClr val="1B3B6F"/>
                 </a:solidFill>
                 <a:latin typeface="Amiri" pitchFamily="2" charset="-78"/>
+                <a:ea typeface="Amiri" pitchFamily="2" charset="-78"/>
                 <a:cs typeface="Amiri" pitchFamily="2" charset="-78"/>
               </a:rPr>
               <a:t>يَوْمٌ</a:t>
@@ -33344,6 +33560,7 @@
                   <a:srgbClr val="1B3B6F"/>
                 </a:solidFill>
                 <a:latin typeface="Amiri" pitchFamily="2" charset="-78"/>
+                <a:ea typeface="Amiri" pitchFamily="2" charset="-78"/>
                 <a:cs typeface="Amiri" pitchFamily="2" charset="-78"/>
               </a:rPr>
               <a:t>أَيَّامٌ</a:t>
@@ -33447,6 +33664,7 @@
                   <a:srgbClr val="1B3B6F"/>
                 </a:solidFill>
                 <a:latin typeface="Amiri" pitchFamily="2" charset="-78"/>
+                <a:ea typeface="Amiri" pitchFamily="2" charset="-78"/>
                 <a:cs typeface="Amiri" pitchFamily="2" charset="-78"/>
               </a:rPr>
               <a:t>يَوْمَانِ</a:t>
@@ -33550,6 +33768,7 @@
                   <a:srgbClr val="1B3B6F"/>
                 </a:solidFill>
                 <a:latin typeface="Amiri" pitchFamily="2" charset="-78"/>
+                <a:ea typeface="Amiri" pitchFamily="2" charset="-78"/>
                 <a:cs typeface="Amiri" pitchFamily="2" charset="-78"/>
               </a:rPr>
               <a:t>يَوْمٌ</a:t>
@@ -33815,6 +34034,7 @@
                   <a:srgbClr val="1B3B6F"/>
                 </a:solidFill>
                 <a:latin typeface="Amiri" pitchFamily="2" charset="-78"/>
+                <a:ea typeface="Amiri" pitchFamily="2" charset="-78"/>
                 <a:cs typeface="Amiri" pitchFamily="2" charset="-78"/>
               </a:rPr>
               <a:t>أُسْبُوعٌ</a:t>
@@ -33972,6 +34192,7 @@
                   <a:srgbClr val="1B3B6F"/>
                 </a:solidFill>
                 <a:latin typeface="Amiri" pitchFamily="2" charset="-78"/>
+                <a:ea typeface="Amiri" pitchFamily="2" charset="-78"/>
                 <a:cs typeface="Amiri" pitchFamily="2" charset="-78"/>
               </a:rPr>
               <a:t>أَسَابِيعُ</a:t>
@@ -34075,6 +34296,7 @@
                   <a:srgbClr val="1B3B6F"/>
                 </a:solidFill>
                 <a:latin typeface="Amiri" pitchFamily="2" charset="-78"/>
+                <a:ea typeface="Amiri" pitchFamily="2" charset="-78"/>
                 <a:cs typeface="Amiri" pitchFamily="2" charset="-78"/>
               </a:rPr>
               <a:t>أُسْبُوعَانِ</a:t>
@@ -34178,6 +34400,7 @@
                   <a:srgbClr val="1B3B6F"/>
                 </a:solidFill>
                 <a:latin typeface="Amiri" pitchFamily="2" charset="-78"/>
+                <a:ea typeface="Amiri" pitchFamily="2" charset="-78"/>
                 <a:cs typeface="Amiri" pitchFamily="2" charset="-78"/>
               </a:rPr>
               <a:t>أُسْبُوعٌ</a:t>
@@ -34443,6 +34666,7 @@
                   <a:srgbClr val="1B3B6F"/>
                 </a:solidFill>
                 <a:latin typeface="Amiri" pitchFamily="2" charset="-78"/>
+                <a:ea typeface="Amiri" pitchFamily="2" charset="-78"/>
                 <a:cs typeface="Amiri" pitchFamily="2" charset="-78"/>
               </a:rPr>
               <a:t>شَهْرٌ</a:t>
@@ -34600,6 +34824,7 @@
                   <a:srgbClr val="1B3B6F"/>
                 </a:solidFill>
                 <a:latin typeface="Amiri" pitchFamily="2" charset="-78"/>
+                <a:ea typeface="Amiri" pitchFamily="2" charset="-78"/>
                 <a:cs typeface="Amiri" pitchFamily="2" charset="-78"/>
               </a:rPr>
               <a:t>أَشْهُرٌ</a:t>
@@ -34703,6 +34928,7 @@
                   <a:srgbClr val="1B3B6F"/>
                 </a:solidFill>
                 <a:latin typeface="Amiri" pitchFamily="2" charset="-78"/>
+                <a:ea typeface="Amiri" pitchFamily="2" charset="-78"/>
                 <a:cs typeface="Amiri" pitchFamily="2" charset="-78"/>
               </a:rPr>
               <a:t>شَهْرَانِ</a:t>
@@ -34806,6 +35032,7 @@
                   <a:srgbClr val="1B3B6F"/>
                 </a:solidFill>
                 <a:latin typeface="Amiri" pitchFamily="2" charset="-78"/>
+                <a:ea typeface="Amiri" pitchFamily="2" charset="-78"/>
                 <a:cs typeface="Amiri" pitchFamily="2" charset="-78"/>
               </a:rPr>
               <a:t>شَهْرٌ</a:t>
@@ -35071,6 +35298,7 @@
                   <a:srgbClr val="1B3B6F"/>
                 </a:solidFill>
                 <a:latin typeface="Amiri" pitchFamily="2" charset="-78"/>
+                <a:ea typeface="Amiri" pitchFamily="2" charset="-78"/>
                 <a:cs typeface="Amiri" pitchFamily="2" charset="-78"/>
               </a:rPr>
               <a:t>سَاعَةٌ</a:t>
@@ -35228,6 +35456,7 @@
                   <a:srgbClr val="1B3B6F"/>
                 </a:solidFill>
                 <a:latin typeface="Amiri" pitchFamily="2" charset="-78"/>
+                <a:ea typeface="Amiri" pitchFamily="2" charset="-78"/>
                 <a:cs typeface="Amiri" pitchFamily="2" charset="-78"/>
               </a:rPr>
               <a:t>سَاعَاتٌ</a:t>
@@ -35331,6 +35560,7 @@
                   <a:srgbClr val="1B3B6F"/>
                 </a:solidFill>
                 <a:latin typeface="Amiri" pitchFamily="2" charset="-78"/>
+                <a:ea typeface="Amiri" pitchFamily="2" charset="-78"/>
                 <a:cs typeface="Amiri" pitchFamily="2" charset="-78"/>
               </a:rPr>
               <a:t>سَاعَتَانِ</a:t>
@@ -35434,6 +35664,7 @@
                   <a:srgbClr val="1B3B6F"/>
                 </a:solidFill>
                 <a:latin typeface="Amiri" pitchFamily="2" charset="-78"/>
+                <a:ea typeface="Amiri" pitchFamily="2" charset="-78"/>
                 <a:cs typeface="Amiri" pitchFamily="2" charset="-78"/>
               </a:rPr>
               <a:t>سَاعَةٌ</a:t>
@@ -35699,6 +35930,7 @@
                   <a:srgbClr val="1B3B6F"/>
                 </a:solidFill>
                 <a:latin typeface="Amiri" pitchFamily="2" charset="-78"/>
+                <a:ea typeface="Amiri" pitchFamily="2" charset="-78"/>
                 <a:cs typeface="Amiri" pitchFamily="2" charset="-78"/>
               </a:rPr>
               <a:t>حِصَّةٌ</a:t>
@@ -35856,6 +36088,7 @@
                   <a:srgbClr val="1B3B6F"/>
                 </a:solidFill>
                 <a:latin typeface="Amiri" pitchFamily="2" charset="-78"/>
+                <a:ea typeface="Amiri" pitchFamily="2" charset="-78"/>
                 <a:cs typeface="Amiri" pitchFamily="2" charset="-78"/>
               </a:rPr>
               <a:t>حِصَصٌ</a:t>
@@ -35959,6 +36192,7 @@
                   <a:srgbClr val="1B3B6F"/>
                 </a:solidFill>
                 <a:latin typeface="Amiri" pitchFamily="2" charset="-78"/>
+                <a:ea typeface="Amiri" pitchFamily="2" charset="-78"/>
                 <a:cs typeface="Amiri" pitchFamily="2" charset="-78"/>
               </a:rPr>
               <a:t>حِصَّتَانِ</a:t>
@@ -36062,6 +36296,7 @@
                   <a:srgbClr val="1B3B6F"/>
                 </a:solidFill>
                 <a:latin typeface="Amiri" pitchFamily="2" charset="-78"/>
+                <a:ea typeface="Amiri" pitchFamily="2" charset="-78"/>
                 <a:cs typeface="Amiri" pitchFamily="2" charset="-78"/>
               </a:rPr>
               <a:t>حِصَّةٌ</a:t>
@@ -36327,6 +36562,7 @@
                   <a:srgbClr val="1B3B6F"/>
                 </a:solidFill>
                 <a:latin typeface="Amiri" pitchFamily="2" charset="-78"/>
+                <a:ea typeface="Amiri" pitchFamily="2" charset="-78"/>
                 <a:cs typeface="Amiri" pitchFamily="2" charset="-78"/>
               </a:rPr>
               <a:t>عُطْلَةٌ</a:t>
@@ -36484,6 +36720,7 @@
                   <a:srgbClr val="1B3B6F"/>
                 </a:solidFill>
                 <a:latin typeface="Amiri" pitchFamily="2" charset="-78"/>
+                <a:ea typeface="Amiri" pitchFamily="2" charset="-78"/>
                 <a:cs typeface="Amiri" pitchFamily="2" charset="-78"/>
               </a:rPr>
               <a:t>عُطَلٌ</a:t>
@@ -36587,6 +36824,7 @@
                   <a:srgbClr val="1B3B6F"/>
                 </a:solidFill>
                 <a:latin typeface="Amiri" pitchFamily="2" charset="-78"/>
+                <a:ea typeface="Amiri" pitchFamily="2" charset="-78"/>
                 <a:cs typeface="Amiri" pitchFamily="2" charset="-78"/>
               </a:rPr>
               <a:t>عُطْلَتَانِ</a:t>
@@ -36690,6 +36928,7 @@
                   <a:srgbClr val="1B3B6F"/>
                 </a:solidFill>
                 <a:latin typeface="Amiri" pitchFamily="2" charset="-78"/>
+                <a:ea typeface="Amiri" pitchFamily="2" charset="-78"/>
                 <a:cs typeface="Amiri" pitchFamily="2" charset="-78"/>
               </a:rPr>
               <a:t>عُطْلَةٌ</a:t>
@@ -36823,6 +37062,7 @@
                   <a:srgbClr val="D4AF37"/>
                 </a:solidFill>
                 <a:latin typeface="Amiri" pitchFamily="2" charset="-78"/>
+                <a:ea typeface="Amiri" pitchFamily="2" charset="-78"/>
                 <a:cs typeface="Amiri" pitchFamily="2" charset="-78"/>
               </a:rPr>
               <a:t>م</a:t>
@@ -37143,6 +37383,7 @@
                   <a:srgbClr val="8A6D1E"/>
                 </a:solidFill>
                 <a:latin typeface="Amiri" pitchFamily="2" charset="-78"/>
+                <a:ea typeface="Amiri" pitchFamily="2" charset="-78"/>
                 <a:cs typeface="Amiri" pitchFamily="2" charset="-78"/>
               </a:rPr>
               <a:t>الأَعْدَادُ التَّرْتِيبِيَّةُ</a:t>
@@ -37446,6 +37687,7 @@
                   <a:srgbClr val="1B3B6F"/>
                 </a:solidFill>
                 <a:latin typeface="Amiri" pitchFamily="2" charset="-78"/>
+                <a:ea typeface="Amiri" pitchFamily="2" charset="-78"/>
                 <a:cs typeface="Amiri" pitchFamily="2" charset="-78"/>
               </a:rPr>
               <a:t>الأَوَّلُ</a:t>
@@ -37603,6 +37845,7 @@
                   <a:srgbClr val="1B3B6F"/>
                 </a:solidFill>
                 <a:latin typeface="Amiri" pitchFamily="2" charset="-78"/>
+                <a:ea typeface="Amiri" pitchFamily="2" charset="-78"/>
                 <a:cs typeface="Amiri" pitchFamily="2" charset="-78"/>
               </a:rPr>
               <a:t>الأُولَى</a:t>
@@ -37706,6 +37949,7 @@
                   <a:srgbClr val="1B3B6F"/>
                 </a:solidFill>
                 <a:latin typeface="Amiri" pitchFamily="2" charset="-78"/>
+                <a:ea typeface="Amiri" pitchFamily="2" charset="-78"/>
                 <a:cs typeface="Amiri" pitchFamily="2" charset="-78"/>
               </a:rPr>
               <a:t>الأَوَّلُ</a:t>
@@ -37971,6 +38215,7 @@
                   <a:srgbClr val="1B3B6F"/>
                 </a:solidFill>
                 <a:latin typeface="Amiri" pitchFamily="2" charset="-78"/>
+                <a:ea typeface="Amiri" pitchFamily="2" charset="-78"/>
                 <a:cs typeface="Amiri" pitchFamily="2" charset="-78"/>
               </a:rPr>
               <a:t>الثَّانِي</a:t>
@@ -38128,6 +38373,7 @@
                   <a:srgbClr val="1B3B6F"/>
                 </a:solidFill>
                 <a:latin typeface="Amiri" pitchFamily="2" charset="-78"/>
+                <a:ea typeface="Amiri" pitchFamily="2" charset="-78"/>
                 <a:cs typeface="Amiri" pitchFamily="2" charset="-78"/>
               </a:rPr>
               <a:t>الثَّانِيَةُ</a:t>
@@ -38231,6 +38477,7 @@
                   <a:srgbClr val="1B3B6F"/>
                 </a:solidFill>
                 <a:latin typeface="Amiri" pitchFamily="2" charset="-78"/>
+                <a:ea typeface="Amiri" pitchFamily="2" charset="-78"/>
                 <a:cs typeface="Amiri" pitchFamily="2" charset="-78"/>
               </a:rPr>
               <a:t>الثَّانِي</a:t>
@@ -38496,6 +38743,7 @@
                   <a:srgbClr val="1B3B6F"/>
                 </a:solidFill>
                 <a:latin typeface="Amiri" pitchFamily="2" charset="-78"/>
+                <a:ea typeface="Amiri" pitchFamily="2" charset="-78"/>
                 <a:cs typeface="Amiri" pitchFamily="2" charset="-78"/>
               </a:rPr>
               <a:t>الثَّالِثُ</a:t>
@@ -38653,6 +38901,7 @@
                   <a:srgbClr val="1B3B6F"/>
                 </a:solidFill>
                 <a:latin typeface="Amiri" pitchFamily="2" charset="-78"/>
+                <a:ea typeface="Amiri" pitchFamily="2" charset="-78"/>
                 <a:cs typeface="Amiri" pitchFamily="2" charset="-78"/>
               </a:rPr>
               <a:t>الثَّالِثَةُ</a:t>
@@ -38756,6 +39005,7 @@
                   <a:srgbClr val="1B3B6F"/>
                 </a:solidFill>
                 <a:latin typeface="Amiri" pitchFamily="2" charset="-78"/>
+                <a:ea typeface="Amiri" pitchFamily="2" charset="-78"/>
                 <a:cs typeface="Amiri" pitchFamily="2" charset="-78"/>
               </a:rPr>
               <a:t>الثَّالِثُ</a:t>
@@ -39021,6 +39271,7 @@
                   <a:srgbClr val="1B3B6F"/>
                 </a:solidFill>
                 <a:latin typeface="Amiri" pitchFamily="2" charset="-78"/>
+                <a:ea typeface="Amiri" pitchFamily="2" charset="-78"/>
                 <a:cs typeface="Amiri" pitchFamily="2" charset="-78"/>
               </a:rPr>
               <a:t>تَارِيخٌ</a:t>
@@ -39178,6 +39429,7 @@
                   <a:srgbClr val="1B3B6F"/>
                 </a:solidFill>
                 <a:latin typeface="Amiri" pitchFamily="2" charset="-78"/>
+                <a:ea typeface="Amiri" pitchFamily="2" charset="-78"/>
                 <a:cs typeface="Amiri" pitchFamily="2" charset="-78"/>
               </a:rPr>
               <a:t>تَوَارِيخُ</a:t>
@@ -39281,6 +39533,7 @@
                   <a:srgbClr val="1B3B6F"/>
                 </a:solidFill>
                 <a:latin typeface="Amiri" pitchFamily="2" charset="-78"/>
+                <a:ea typeface="Amiri" pitchFamily="2" charset="-78"/>
                 <a:cs typeface="Amiri" pitchFamily="2" charset="-78"/>
               </a:rPr>
               <a:t>تَارِيخٌ</a:t>
@@ -39546,6 +39799,7 @@
                   <a:srgbClr val="1B3B6F"/>
                 </a:solidFill>
                 <a:latin typeface="Amiri" pitchFamily="2" charset="-78"/>
+                <a:ea typeface="Amiri" pitchFamily="2" charset="-78"/>
                 <a:cs typeface="Amiri" pitchFamily="2" charset="-78"/>
               </a:rPr>
               <a:t>مَوْعِدٌ</a:t>
@@ -39703,6 +39957,7 @@
                   <a:srgbClr val="1B3B6F"/>
                 </a:solidFill>
                 <a:latin typeface="Amiri" pitchFamily="2" charset="-78"/>
+                <a:ea typeface="Amiri" pitchFamily="2" charset="-78"/>
                 <a:cs typeface="Amiri" pitchFamily="2" charset="-78"/>
               </a:rPr>
               <a:t>مَوَاعِيدُ</a:t>
@@ -39806,6 +40061,7 @@
                   <a:srgbClr val="1B3B6F"/>
                 </a:solidFill>
                 <a:latin typeface="Amiri" pitchFamily="2" charset="-78"/>
+                <a:ea typeface="Amiri" pitchFamily="2" charset="-78"/>
                 <a:cs typeface="Amiri" pitchFamily="2" charset="-78"/>
               </a:rPr>
               <a:t>مَوْعِدٌ</a:t>
@@ -40071,6 +40327,7 @@
                   <a:srgbClr val="1B3B6F"/>
                 </a:solidFill>
                 <a:latin typeface="Amiri" pitchFamily="2" charset="-78"/>
+                <a:ea typeface="Amiri" pitchFamily="2" charset="-78"/>
                 <a:cs typeface="Amiri" pitchFamily="2" charset="-78"/>
               </a:rPr>
               <a:t>صَبَاحًا · مَسَاءً</a:t>
@@ -40258,6 +40515,7 @@
                   <a:srgbClr val="D4AF37"/>
                 </a:solidFill>
                 <a:latin typeface="Amiri" pitchFamily="2" charset="-78"/>
+                <a:ea typeface="Amiri" pitchFamily="2" charset="-78"/>
                 <a:cs typeface="Amiri" pitchFamily="2" charset="-78"/>
               </a:rPr>
               <a:t>م</a:t>
@@ -40578,6 +40836,7 @@
                   <a:srgbClr val="8A6D1E"/>
                 </a:solidFill>
                 <a:latin typeface="Amiri" pitchFamily="2" charset="-78"/>
+                <a:ea typeface="Amiri" pitchFamily="2" charset="-78"/>
                 <a:cs typeface="Amiri" pitchFamily="2" charset="-78"/>
               </a:rPr>
               <a:t>فِي الغُرَفِ</a:t>
@@ -41754,6 +42013,7 @@
                   <a:srgbClr val="1B3B6F"/>
                 </a:solidFill>
                 <a:latin typeface="Amiri" pitchFamily="2" charset="-78"/>
+                <a:ea typeface="Amiri" pitchFamily="2" charset="-78"/>
                 <a:cs typeface="Amiri" pitchFamily="2" charset="-78"/>
               </a:rPr>
               <a:t>دَوْرُكَ!</a:t>
@@ -41830,6 +42090,7 @@
                   <a:srgbClr val="1B3B6F"/>
                 </a:solidFill>
                 <a:latin typeface="Amiri" pitchFamily="2" charset="-78"/>
+                <a:ea typeface="Amiri" pitchFamily="2" charset="-78"/>
                 <a:cs typeface="Amiri" pitchFamily="2" charset="-78"/>
               </a:rPr>
               <a:t>أَحْسَنْتَ! / أَحْسَنْتِ!</a:t>
@@ -41906,6 +42167,7 @@
                   <a:srgbClr val="1B3B6F"/>
                 </a:solidFill>
                 <a:latin typeface="Amiri" pitchFamily="2" charset="-78"/>
+                <a:ea typeface="Amiri" pitchFamily="2" charset="-78"/>
                 <a:cs typeface="Amiri" pitchFamily="2" charset="-78"/>
               </a:rPr>
               <a:t>تَكَلَّمْ أَكْثَرَ، مِنْ فَضْلِكَ</a:t>
@@ -41982,6 +42244,7 @@
                   <a:srgbClr val="1B3B6F"/>
                 </a:solidFill>
                 <a:latin typeface="Amiri" pitchFamily="2" charset="-78"/>
+                <a:ea typeface="Amiri" pitchFamily="2" charset="-78"/>
                 <a:cs typeface="Amiri" pitchFamily="2" charset="-78"/>
               </a:rPr>
               <a:t>لِمَاذَا؟</a:t>
@@ -42153,6 +42416,7 @@
                   <a:srgbClr val="D4AF37"/>
                 </a:solidFill>
                 <a:latin typeface="Amiri" pitchFamily="2" charset="-78"/>
+                <a:ea typeface="Amiri" pitchFamily="2" charset="-78"/>
                 <a:cs typeface="Amiri" pitchFamily="2" charset="-78"/>
               </a:rPr>
               <a:t>م</a:t>
@@ -42473,6 +42737,7 @@
                   <a:srgbClr val="8A6D1E"/>
                 </a:solidFill>
                 <a:latin typeface="Amiri" pitchFamily="2" charset="-78"/>
+                <a:ea typeface="Amiri" pitchFamily="2" charset="-78"/>
                 <a:cs typeface="Amiri" pitchFamily="2" charset="-78"/>
               </a:rPr>
               <a:t>فِي المَرْكَزِ الرِّيَاضِيِّ</a:t>
@@ -42753,6 +43018,7 @@
                   <a:srgbClr val="1B3B6F"/>
                 </a:solidFill>
                 <a:latin typeface="Amiri" pitchFamily="2" charset="-78"/>
+                <a:ea typeface="Amiri" pitchFamily="2" charset="-78"/>
                 <a:cs typeface="Amiri" pitchFamily="2" charset="-78"/>
               </a:rPr>
               <a:t>اسْمِي …</a:t>
@@ -42829,6 +43095,7 @@
                   <a:srgbClr val="1B3B6F"/>
                 </a:solidFill>
                 <a:latin typeface="Amiri" pitchFamily="2" charset="-78"/>
+                <a:ea typeface="Amiri" pitchFamily="2" charset="-78"/>
                 <a:cs typeface="Amiri" pitchFamily="2" charset="-78"/>
               </a:rPr>
               <a:t>صَبَاحَ الخَيْرِ! مَا اسْمُكَ؟</a:t>
@@ -42997,6 +43264,7 @@
                   <a:srgbClr val="1B3B6F"/>
                 </a:solidFill>
                 <a:latin typeface="Amiri" pitchFamily="2" charset="-78"/>
+                <a:ea typeface="Amiri" pitchFamily="2" charset="-78"/>
                 <a:cs typeface="Amiri" pitchFamily="2" charset="-78"/>
               </a:rPr>
               <a:t>أُرِيدُ الدَّرْسَ يَوْمَ …</a:t>
@@ -43073,6 +43341,7 @@
                   <a:srgbClr val="1B3B6F"/>
                 </a:solidFill>
                 <a:latin typeface="Amiri" pitchFamily="2" charset="-78"/>
+                <a:ea typeface="Amiri" pitchFamily="2" charset="-78"/>
                 <a:cs typeface="Amiri" pitchFamily="2" charset="-78"/>
               </a:rPr>
               <a:t>أَيَّ يَوْمٍ تُرِيدُ الدَّرْسَ؟</a:t>
@@ -43241,6 +43510,7 @@
                   <a:srgbClr val="1B3B6F"/>
                 </a:solidFill>
                 <a:latin typeface="Amiri" pitchFamily="2" charset="-78"/>
+                <a:ea typeface="Amiri" pitchFamily="2" charset="-78"/>
                 <a:cs typeface="Amiri" pitchFamily="2" charset="-78"/>
               </a:rPr>
               <a:t>فِي السَّاعَةِ … صَبَاحًا</a:t>
@@ -43317,6 +43587,7 @@
                   <a:srgbClr val="1B3B6F"/>
                 </a:solidFill>
                 <a:latin typeface="Amiri" pitchFamily="2" charset="-78"/>
+                <a:ea typeface="Amiri" pitchFamily="2" charset="-78"/>
                 <a:cs typeface="Amiri" pitchFamily="2" charset="-78"/>
               </a:rPr>
               <a:t>فِي أَيِّ سَاعَةٍ؟</a:t>
@@ -43485,6 +43756,7 @@
                   <a:srgbClr val="1B3B6F"/>
                 </a:solidFill>
                 <a:latin typeface="Amiri" pitchFamily="2" charset="-78"/>
+                <a:ea typeface="Amiri" pitchFamily="2" charset="-78"/>
                 <a:cs typeface="Amiri" pitchFamily="2" charset="-78"/>
               </a:rPr>
               <a:t>تَارِيخُ مِيلَادِي … مِنْ …</a:t>
@@ -43561,6 +43833,7 @@
                   <a:srgbClr val="1B3B6F"/>
                 </a:solidFill>
                 <a:latin typeface="Amiri" pitchFamily="2" charset="-78"/>
+                <a:ea typeface="Amiri" pitchFamily="2" charset="-78"/>
                 <a:cs typeface="Amiri" pitchFamily="2" charset="-78"/>
               </a:rPr>
               <a:t>مَا تَارِيخُ مِيلَادِكَ؟</a:t>
@@ -43729,6 +44002,7 @@
                   <a:srgbClr val="1B3B6F"/>
                 </a:solidFill>
                 <a:latin typeface="Amiri" pitchFamily="2" charset="-78"/>
+                <a:ea typeface="Amiri" pitchFamily="2" charset="-78"/>
                 <a:cs typeface="Amiri" pitchFamily="2" charset="-78"/>
               </a:rPr>
               <a:t>نَعَمْ، يُنَاسِبُنِي …</a:t>
@@ -43805,6 +44079,7 @@
                   <a:srgbClr val="1B3B6F"/>
                 </a:solidFill>
                 <a:latin typeface="Amiri" pitchFamily="2" charset="-78"/>
+                <a:ea typeface="Amiri" pitchFamily="2" charset="-78"/>
                 <a:cs typeface="Amiri" pitchFamily="2" charset="-78"/>
               </a:rPr>
               <a:t>هَلْ يُنَاسِبُكَ الأُسْبُوعُ القَادِمُ؟</a:t>
@@ -44079,6 +44354,7 @@
                   <a:srgbClr val="D4AF37"/>
                 </a:solidFill>
                 <a:latin typeface="Amiri" pitchFamily="2" charset="-78"/>
+                <a:ea typeface="Amiri" pitchFamily="2" charset="-78"/>
                 <a:cs typeface="Amiri" pitchFamily="2" charset="-78"/>
               </a:rPr>
               <a:t>م</a:t>
@@ -44399,6 +44675,7 @@
                   <a:srgbClr val="8A6D1E"/>
                 </a:solidFill>
                 <a:latin typeface="Amiri" pitchFamily="2" charset="-78"/>
+                <a:ea typeface="Amiri" pitchFamily="2" charset="-78"/>
                 <a:cs typeface="Amiri" pitchFamily="2" charset="-78"/>
               </a:rPr>
               <a:t>حَفْلَةُ عِيدِ المِيلَادِ</a:t>
@@ -44679,6 +44956,7 @@
                   <a:srgbClr val="1B3B6F"/>
                 </a:solidFill>
                 <a:latin typeface="Amiri" pitchFamily="2" charset="-78"/>
+                <a:ea typeface="Amiri" pitchFamily="2" charset="-78"/>
                 <a:cs typeface="Amiri" pitchFamily="2" charset="-78"/>
               </a:rPr>
               <a:t>عِيدُ مِيلَادِي فِي … مِنْ …</a:t>
@@ -44755,6 +45033,7 @@
                   <a:srgbClr val="1B3B6F"/>
                 </a:solidFill>
                 <a:latin typeface="Amiri" pitchFamily="2" charset="-78"/>
+                <a:ea typeface="Amiri" pitchFamily="2" charset="-78"/>
                 <a:cs typeface="Amiri" pitchFamily="2" charset="-78"/>
               </a:rPr>
               <a:t>مَتَى عِيدُ مِيلَادِكَ؟</a:t>
@@ -44923,6 +45202,7 @@
                   <a:srgbClr val="1B3B6F"/>
                 </a:solidFill>
                 <a:latin typeface="Amiri" pitchFamily="2" charset="-78"/>
+                <a:ea typeface="Amiri" pitchFamily="2" charset="-78"/>
                 <a:cs typeface="Amiri" pitchFamily="2" charset="-78"/>
               </a:rPr>
               <a:t>الحَفْلَةُ يَوْمَ …</a:t>
@@ -44999,6 +45279,7 @@
                   <a:srgbClr val="1B3B6F"/>
                 </a:solidFill>
                 <a:latin typeface="Amiri" pitchFamily="2" charset="-78"/>
+                <a:ea typeface="Amiri" pitchFamily="2" charset="-78"/>
                 <a:cs typeface="Amiri" pitchFamily="2" charset="-78"/>
               </a:rPr>
               <a:t>فِي أَيِّ يَوْمٍ الحَفْلَةُ؟</a:t>
@@ -45167,6 +45448,7 @@
                   <a:srgbClr val="1B3B6F"/>
                 </a:solidFill>
                 <a:latin typeface="Amiri" pitchFamily="2" charset="-78"/>
+                <a:ea typeface="Amiri" pitchFamily="2" charset="-78"/>
                 <a:cs typeface="Amiri" pitchFamily="2" charset="-78"/>
               </a:rPr>
               <a:t>تَبْدَأُ فِي … وَتَنْتَهِي فِي …</a:t>
@@ -45243,6 +45525,7 @@
                   <a:srgbClr val="1B3B6F"/>
                 </a:solidFill>
                 <a:latin typeface="Amiri" pitchFamily="2" charset="-78"/>
+                <a:ea typeface="Amiri" pitchFamily="2" charset="-78"/>
                 <a:cs typeface="Amiri" pitchFamily="2" charset="-78"/>
               </a:rPr>
               <a:t>مَتَى تَبْدَأُ، وَمَتَى تَنْتَهِي؟</a:t>
@@ -45346,6 +45629,7 @@
                   <a:srgbClr val="1B3B6F"/>
                 </a:solidFill>
                 <a:latin typeface="Amiri" pitchFamily="2" charset="-78"/>
+                <a:ea typeface="Amiri" pitchFamily="2" charset="-78"/>
                 <a:cs typeface="Amiri" pitchFamily="2" charset="-78"/>
               </a:rPr>
               <a:t>هَلْ أَنْتَ مُتَفَرِّغٌ …؟</a:t>
@@ -45422,6 +45706,7 @@
                   <a:srgbClr val="1B3B6F"/>
                 </a:solidFill>
                 <a:latin typeface="Amiri" pitchFamily="2" charset="-78"/>
+                <a:ea typeface="Amiri" pitchFamily="2" charset="-78"/>
                 <a:cs typeface="Amiri" pitchFamily="2" charset="-78"/>
               </a:rPr>
               <a:t>… نَعَمْ، أَنَا مُتَفَرِّغٌ بَعْدَ العَصْرِ.</a:t>
@@ -45525,6 +45810,7 @@
                   <a:srgbClr val="1B3B6F"/>
                 </a:solidFill>
                 <a:latin typeface="Amiri" pitchFamily="2" charset="-78"/>
+                <a:ea typeface="Amiri" pitchFamily="2" charset="-78"/>
                 <a:cs typeface="Amiri" pitchFamily="2" charset="-78"/>
               </a:rPr>
               <a:t>سَنَأْكُلُ … وَنَلْعَبُ …</a:t>
@@ -45601,6 +45887,7 @@
                   <a:srgbClr val="1B3B6F"/>
                 </a:solidFill>
                 <a:latin typeface="Amiri" pitchFamily="2" charset="-78"/>
+                <a:ea typeface="Amiri" pitchFamily="2" charset="-78"/>
                 <a:cs typeface="Amiri" pitchFamily="2" charset="-78"/>
               </a:rPr>
               <a:t>مَاذَا سَنَفْعَلُ فِي الحَفْلَةِ؟</a:t>
@@ -45775,13 +46062,9 @@
     <a:fontScheme name="Office">
       <a:majorFont>
         <a:latin typeface="Calibri Light" panose="020F0302020204030204"/>
-        <a:ea typeface=""/>
-        <a:cs typeface=""/>
-        <a:font script="Jpan" typeface="游ゴシック Light"/>
-        <a:font script="Hang" typeface="맑은 고딕"/>
-        <a:font script="Hans" typeface="等线 Light"/>
-        <a:font script="Hant" typeface="新細明體"/>
-        <a:font script="Arab" typeface="Times New Roman"/>
+        <a:ea typeface="Amiri" pitchFamily="2" charset="-78"/>
+        <a:cs typeface="Amiri" pitchFamily="2" charset="-78"/>
+        <a:font script="Arab" typeface="Amiri"/>
         <a:font script="Hebr" typeface="Times New Roman"/>
         <a:font script="Thai" typeface="Angsana New"/>
         <a:font script="Ethi" typeface="Nyala"/>
@@ -45827,13 +46110,9 @@
       </a:majorFont>
       <a:minorFont>
         <a:latin typeface="Calibri" panose="020F0502020204030204"/>
-        <a:ea typeface=""/>
-        <a:cs typeface=""/>
-        <a:font script="Jpan" typeface="游ゴシック"/>
-        <a:font script="Hang" typeface="맑은 고딕"/>
-        <a:font script="Hans" typeface="等线"/>
-        <a:font script="Hant" typeface="新細明體"/>
-        <a:font script="Arab" typeface="Arial"/>
+        <a:ea typeface="Amiri" pitchFamily="2" charset="-78"/>
+        <a:cs typeface="Amiri" pitchFamily="2" charset="-78"/>
+        <a:font script="Arab" typeface="Amiri"/>
         <a:font script="Hebr" typeface="Arial"/>
         <a:font script="Thai" typeface="Cordia New"/>
         <a:font script="Ethi" typeface="Nyala"/>
